--- a/Apartment_Prices_Craiova.pptx
+++ b/Apartment_Prices_Craiova.pptx
@@ -6,15 +6,22 @@
   </p:sldMasterIdLst>
   <p:sldIdLst>
     <p:sldId id="256" r:id="rId2"/>
-    <p:sldId id="258" r:id="rId3"/>
-    <p:sldId id="259" r:id="rId4"/>
-    <p:sldId id="260" r:id="rId5"/>
-    <p:sldId id="261" r:id="rId6"/>
-    <p:sldId id="262" r:id="rId7"/>
-    <p:sldId id="263" r:id="rId8"/>
-    <p:sldId id="264" r:id="rId9"/>
-    <p:sldId id="265" r:id="rId10"/>
-    <p:sldId id="266" r:id="rId11"/>
+    <p:sldId id="267" r:id="rId3"/>
+    <p:sldId id="258" r:id="rId4"/>
+    <p:sldId id="269" r:id="rId5"/>
+    <p:sldId id="268" r:id="rId6"/>
+    <p:sldId id="259" r:id="rId7"/>
+    <p:sldId id="260" r:id="rId8"/>
+    <p:sldId id="261" r:id="rId9"/>
+    <p:sldId id="262" r:id="rId10"/>
+    <p:sldId id="263" r:id="rId11"/>
+    <p:sldId id="264" r:id="rId12"/>
+    <p:sldId id="265" r:id="rId13"/>
+    <p:sldId id="270" r:id="rId14"/>
+    <p:sldId id="271" r:id="rId15"/>
+    <p:sldId id="272" r:id="rId16"/>
+    <p:sldId id="266" r:id="rId17"/>
+    <p:sldId id="273" r:id="rId18"/>
   </p:sldIdLst>
   <p:sldSz cx="12192000" cy="6858000"/>
   <p:notesSz cx="6858000" cy="9144000"/>
@@ -270,7 +277,7 @@
           <a:p>
             <a:fld id="{B4F88105-B876-40B1-B4B9-E60C6B883FEB}" type="datetimeFigureOut">
               <a:rPr lang="ro-RO" smtClean="0"/>
-              <a:t>13.12.2025</a:t>
+              <a:t>17.01.2026</a:t>
             </a:fld>
             <a:endParaRPr lang="ro-RO"/>
           </a:p>
@@ -470,7 +477,7 @@
           <a:p>
             <a:fld id="{B4F88105-B876-40B1-B4B9-E60C6B883FEB}" type="datetimeFigureOut">
               <a:rPr lang="ro-RO" smtClean="0"/>
-              <a:t>13.12.2025</a:t>
+              <a:t>17.01.2026</a:t>
             </a:fld>
             <a:endParaRPr lang="ro-RO"/>
           </a:p>
@@ -680,7 +687,7 @@
           <a:p>
             <a:fld id="{B4F88105-B876-40B1-B4B9-E60C6B883FEB}" type="datetimeFigureOut">
               <a:rPr lang="ro-RO" smtClean="0"/>
-              <a:t>13.12.2025</a:t>
+              <a:t>17.01.2026</a:t>
             </a:fld>
             <a:endParaRPr lang="ro-RO"/>
           </a:p>
@@ -880,7 +887,7 @@
           <a:p>
             <a:fld id="{B4F88105-B876-40B1-B4B9-E60C6B883FEB}" type="datetimeFigureOut">
               <a:rPr lang="ro-RO" smtClean="0"/>
-              <a:t>13.12.2025</a:t>
+              <a:t>17.01.2026</a:t>
             </a:fld>
             <a:endParaRPr lang="ro-RO"/>
           </a:p>
@@ -1156,7 +1163,7 @@
           <a:p>
             <a:fld id="{B4F88105-B876-40B1-B4B9-E60C6B883FEB}" type="datetimeFigureOut">
               <a:rPr lang="ro-RO" smtClean="0"/>
-              <a:t>13.12.2025</a:t>
+              <a:t>17.01.2026</a:t>
             </a:fld>
             <a:endParaRPr lang="ro-RO"/>
           </a:p>
@@ -1424,7 +1431,7 @@
           <a:p>
             <a:fld id="{B4F88105-B876-40B1-B4B9-E60C6B883FEB}" type="datetimeFigureOut">
               <a:rPr lang="ro-RO" smtClean="0"/>
-              <a:t>13.12.2025</a:t>
+              <a:t>17.01.2026</a:t>
             </a:fld>
             <a:endParaRPr lang="ro-RO"/>
           </a:p>
@@ -1839,7 +1846,7 @@
           <a:p>
             <a:fld id="{B4F88105-B876-40B1-B4B9-E60C6B883FEB}" type="datetimeFigureOut">
               <a:rPr lang="ro-RO" smtClean="0"/>
-              <a:t>13.12.2025</a:t>
+              <a:t>17.01.2026</a:t>
             </a:fld>
             <a:endParaRPr lang="ro-RO"/>
           </a:p>
@@ -1981,7 +1988,7 @@
           <a:p>
             <a:fld id="{B4F88105-B876-40B1-B4B9-E60C6B883FEB}" type="datetimeFigureOut">
               <a:rPr lang="ro-RO" smtClean="0"/>
-              <a:t>13.12.2025</a:t>
+              <a:t>17.01.2026</a:t>
             </a:fld>
             <a:endParaRPr lang="ro-RO"/>
           </a:p>
@@ -2094,7 +2101,7 @@
           <a:p>
             <a:fld id="{B4F88105-B876-40B1-B4B9-E60C6B883FEB}" type="datetimeFigureOut">
               <a:rPr lang="ro-RO" smtClean="0"/>
-              <a:t>13.12.2025</a:t>
+              <a:t>17.01.2026</a:t>
             </a:fld>
             <a:endParaRPr lang="ro-RO"/>
           </a:p>
@@ -2407,7 +2414,7 @@
           <a:p>
             <a:fld id="{B4F88105-B876-40B1-B4B9-E60C6B883FEB}" type="datetimeFigureOut">
               <a:rPr lang="ro-RO" smtClean="0"/>
-              <a:t>13.12.2025</a:t>
+              <a:t>17.01.2026</a:t>
             </a:fld>
             <a:endParaRPr lang="ro-RO"/>
           </a:p>
@@ -2696,7 +2703,7 @@
           <a:p>
             <a:fld id="{B4F88105-B876-40B1-B4B9-E60C6B883FEB}" type="datetimeFigureOut">
               <a:rPr lang="ro-RO" smtClean="0"/>
-              <a:t>13.12.2025</a:t>
+              <a:t>17.01.2026</a:t>
             </a:fld>
             <a:endParaRPr lang="ro-RO"/>
           </a:p>
@@ -2939,7 +2946,7 @@
           <a:p>
             <a:fld id="{B4F88105-B876-40B1-B4B9-E60C6B883FEB}" type="datetimeFigureOut">
               <a:rPr lang="ro-RO" smtClean="0"/>
-              <a:t>13.12.2025</a:t>
+              <a:t>17.01.2026</a:t>
             </a:fld>
             <a:endParaRPr lang="ro-RO"/>
           </a:p>
@@ -3566,6 +3573,1705 @@
           <p:cNvPr id="2" name="TextBox 1">
             <a:extLst>
               <a:ext uri="{FF2B5EF4-FFF2-40B4-BE49-F238E27FC236}">
+                <a16:creationId xmlns:a16="http://schemas.microsoft.com/office/drawing/2014/main" id="{EE3FDAD6-0123-1917-8A66-2A5C3BFB4287}"/>
+              </a:ext>
+            </a:extLst>
+          </p:cNvPr>
+          <p:cNvSpPr txBox="1"/>
+          <p:nvPr/>
+        </p:nvSpPr>
+        <p:spPr>
+          <a:xfrm>
+            <a:off x="283464" y="98798"/>
+            <a:ext cx="2871216" cy="369332"/>
+          </a:xfrm>
+          <a:prstGeom prst="rect">
+            <a:avLst/>
+          </a:prstGeom>
+          <a:noFill/>
+        </p:spPr>
+        <p:txBody>
+          <a:bodyPr wrap="square" rtlCol="0">
+            <a:spAutoFit/>
+          </a:bodyPr>
+          <a:lstStyle/>
+          <a:p>
+            <a:r>
+              <a:rPr lang="en-US" b="1" dirty="0" err="1"/>
+              <a:t>merged_data</a:t>
+            </a:r>
+            <a:r>
+              <a:rPr lang="en-US" b="1" dirty="0"/>
+              <a:t> </a:t>
+            </a:r>
+            <a:r>
+              <a:rPr lang="en-US" dirty="0"/>
+              <a:t>directory </a:t>
+            </a:r>
+            <a:endParaRPr lang="ro-RO" dirty="0"/>
+          </a:p>
+        </p:txBody>
+      </p:sp>
+      <p:pic>
+        <p:nvPicPr>
+          <p:cNvPr id="4" name="Picture 3" descr="A screenshot of a computer&#10;&#10;AI-generated content may be incorrect.">
+            <a:extLst>
+              <a:ext uri="{FF2B5EF4-FFF2-40B4-BE49-F238E27FC236}">
+                <a16:creationId xmlns:a16="http://schemas.microsoft.com/office/drawing/2014/main" id="{5A742718-C2FC-A45D-A41E-DCF6E3D72CD2}"/>
+              </a:ext>
+            </a:extLst>
+          </p:cNvPr>
+          <p:cNvPicPr>
+            <a:picLocks noChangeAspect="1"/>
+          </p:cNvPicPr>
+          <p:nvPr/>
+        </p:nvPicPr>
+        <p:blipFill>
+          <a:blip r:embed="rId2"/>
+          <a:stretch>
+            <a:fillRect/>
+          </a:stretch>
+        </p:blipFill>
+        <p:spPr>
+          <a:xfrm>
+            <a:off x="0" y="468130"/>
+            <a:ext cx="4966760" cy="2960870"/>
+          </a:xfrm>
+          <a:prstGeom prst="rect">
+            <a:avLst/>
+          </a:prstGeom>
+        </p:spPr>
+      </p:pic>
+      <p:sp>
+        <p:nvSpPr>
+          <p:cNvPr id="5" name="TextBox 4">
+            <a:extLst>
+              <a:ext uri="{FF2B5EF4-FFF2-40B4-BE49-F238E27FC236}">
+                <a16:creationId xmlns:a16="http://schemas.microsoft.com/office/drawing/2014/main" id="{E147D2DA-B3AB-951D-A2FF-E63BF9834729}"/>
+              </a:ext>
+            </a:extLst>
+          </p:cNvPr>
+          <p:cNvSpPr txBox="1"/>
+          <p:nvPr/>
+        </p:nvSpPr>
+        <p:spPr>
+          <a:xfrm>
+            <a:off x="3057144" y="98798"/>
+            <a:ext cx="8851392" cy="369332"/>
+          </a:xfrm>
+          <a:prstGeom prst="rect">
+            <a:avLst/>
+          </a:prstGeom>
+          <a:noFill/>
+        </p:spPr>
+        <p:txBody>
+          <a:bodyPr wrap="square" rtlCol="0">
+            <a:spAutoFit/>
+          </a:bodyPr>
+          <a:lstStyle/>
+          <a:p>
+            <a:r>
+              <a:rPr lang="en-US" dirty="0" err="1"/>
+              <a:t>Practic</a:t>
+            </a:r>
+            <a:r>
+              <a:rPr lang="en-US" dirty="0"/>
+              <a:t>, </a:t>
+            </a:r>
+            <a:r>
+              <a:rPr lang="en-US" dirty="0" err="1"/>
+              <a:t>aici</a:t>
+            </a:r>
+            <a:r>
+              <a:rPr lang="en-US" dirty="0"/>
+              <a:t> “</a:t>
+            </a:r>
+            <a:r>
+              <a:rPr lang="en-US" dirty="0" err="1"/>
+              <a:t>lipim</a:t>
+            </a:r>
+            <a:r>
+              <a:rPr lang="en-US" dirty="0"/>
+              <a:t>” </a:t>
+            </a:r>
+            <a:r>
+              <a:rPr lang="en-US" dirty="0" err="1"/>
+              <a:t>rezultatele</a:t>
+            </a:r>
+            <a:r>
+              <a:rPr lang="en-US" dirty="0"/>
+              <a:t> generate din </a:t>
+            </a:r>
+            <a:r>
+              <a:rPr lang="en-US" b="1" dirty="0"/>
+              <a:t>1900 - 2011</a:t>
+            </a:r>
+            <a:r>
+              <a:rPr lang="en-US" dirty="0"/>
+              <a:t>, cu </a:t>
+            </a:r>
+            <a:r>
+              <a:rPr lang="en-US" dirty="0" err="1"/>
+              <a:t>datele</a:t>
+            </a:r>
+            <a:r>
+              <a:rPr lang="en-US" dirty="0"/>
+              <a:t> </a:t>
+            </a:r>
+            <a:r>
+              <a:rPr lang="en-US" dirty="0" err="1"/>
+              <a:t>reale</a:t>
+            </a:r>
+            <a:r>
+              <a:rPr lang="en-US" dirty="0"/>
+              <a:t> din </a:t>
+            </a:r>
+            <a:r>
+              <a:rPr lang="en-US" b="1" dirty="0"/>
+              <a:t>2012 – 2025.</a:t>
+            </a:r>
+            <a:endParaRPr lang="ro-RO" b="1" dirty="0"/>
+          </a:p>
+        </p:txBody>
+      </p:sp>
+      <p:pic>
+        <p:nvPicPr>
+          <p:cNvPr id="7" name="Picture 6" descr="A screenshot of a computer screen&#10;&#10;AI-generated content may be incorrect.">
+            <a:extLst>
+              <a:ext uri="{FF2B5EF4-FFF2-40B4-BE49-F238E27FC236}">
+                <a16:creationId xmlns:a16="http://schemas.microsoft.com/office/drawing/2014/main" id="{DD3E2BCA-9ECC-D4EE-2D4D-4DE3736C9416}"/>
+              </a:ext>
+            </a:extLst>
+          </p:cNvPr>
+          <p:cNvPicPr>
+            <a:picLocks noChangeAspect="1"/>
+          </p:cNvPicPr>
+          <p:nvPr/>
+        </p:nvPicPr>
+        <p:blipFill>
+          <a:blip r:embed="rId3"/>
+          <a:stretch>
+            <a:fillRect/>
+          </a:stretch>
+        </p:blipFill>
+        <p:spPr>
+          <a:xfrm>
+            <a:off x="4966760" y="468130"/>
+            <a:ext cx="3612620" cy="6389870"/>
+          </a:xfrm>
+          <a:prstGeom prst="rect">
+            <a:avLst/>
+          </a:prstGeom>
+        </p:spPr>
+      </p:pic>
+      <p:pic>
+        <p:nvPicPr>
+          <p:cNvPr id="9" name="Picture 8" descr="A screenshot of a computer screen&#10;&#10;AI-generated content may be incorrect.">
+            <a:extLst>
+              <a:ext uri="{FF2B5EF4-FFF2-40B4-BE49-F238E27FC236}">
+                <a16:creationId xmlns:a16="http://schemas.microsoft.com/office/drawing/2014/main" id="{1DAAEAA1-5C46-53DB-CD9A-9AEBE80425FE}"/>
+              </a:ext>
+            </a:extLst>
+          </p:cNvPr>
+          <p:cNvPicPr>
+            <a:picLocks noChangeAspect="1"/>
+          </p:cNvPicPr>
+          <p:nvPr/>
+        </p:nvPicPr>
+        <p:blipFill>
+          <a:blip r:embed="rId4"/>
+          <a:stretch>
+            <a:fillRect/>
+          </a:stretch>
+        </p:blipFill>
+        <p:spPr>
+          <a:xfrm>
+            <a:off x="8579380" y="468130"/>
+            <a:ext cx="3612620" cy="6389870"/>
+          </a:xfrm>
+          <a:prstGeom prst="rect">
+            <a:avLst/>
+          </a:prstGeom>
+        </p:spPr>
+      </p:pic>
+      <p:pic>
+        <p:nvPicPr>
+          <p:cNvPr id="11" name="Picture 10" descr="A graph with a line&#10;&#10;AI-generated content may be incorrect.">
+            <a:extLst>
+              <a:ext uri="{FF2B5EF4-FFF2-40B4-BE49-F238E27FC236}">
+                <a16:creationId xmlns:a16="http://schemas.microsoft.com/office/drawing/2014/main" id="{DBB54130-2130-256F-E9FB-E50E9B4F2A35}"/>
+              </a:ext>
+            </a:extLst>
+          </p:cNvPr>
+          <p:cNvPicPr>
+            <a:picLocks noChangeAspect="1"/>
+          </p:cNvPicPr>
+          <p:nvPr/>
+        </p:nvPicPr>
+        <p:blipFill>
+          <a:blip r:embed="rId5"/>
+          <a:stretch>
+            <a:fillRect/>
+          </a:stretch>
+        </p:blipFill>
+        <p:spPr>
+          <a:xfrm>
+            <a:off x="0" y="3511296"/>
+            <a:ext cx="4966760" cy="3346704"/>
+          </a:xfrm>
+          <a:prstGeom prst="rect">
+            <a:avLst/>
+          </a:prstGeom>
+        </p:spPr>
+      </p:pic>
+      <p:sp>
+        <p:nvSpPr>
+          <p:cNvPr id="8" name="TextBox 7">
+            <a:extLst>
+              <a:ext uri="{FF2B5EF4-FFF2-40B4-BE49-F238E27FC236}">
+                <a16:creationId xmlns:a16="http://schemas.microsoft.com/office/drawing/2014/main" id="{6459C8A6-5D20-721A-8E85-98199D3C6AEB}"/>
+              </a:ext>
+            </a:extLst>
+          </p:cNvPr>
+          <p:cNvSpPr txBox="1"/>
+          <p:nvPr/>
+        </p:nvSpPr>
+        <p:spPr>
+          <a:xfrm>
+            <a:off x="677070" y="4837471"/>
+            <a:ext cx="3612620" cy="523220"/>
+          </a:xfrm>
+          <a:prstGeom prst="rect">
+            <a:avLst/>
+          </a:prstGeom>
+          <a:noFill/>
+        </p:spPr>
+        <p:txBody>
+          <a:bodyPr wrap="square" rtlCol="0">
+            <a:spAutoFit/>
+          </a:bodyPr>
+          <a:lstStyle/>
+          <a:p>
+            <a:r>
+              <a:rPr lang="en-US" sz="2800" b="1" dirty="0"/>
+              <a:t>6. </a:t>
+            </a:r>
+            <a:r>
+              <a:rPr lang="en-US" sz="2800" b="1" dirty="0" err="1"/>
+              <a:t>Intervalul</a:t>
+            </a:r>
+            <a:r>
+              <a:rPr lang="en-US" sz="2800" b="1" dirty="0"/>
+              <a:t> 1900-2025</a:t>
+            </a:r>
+            <a:endParaRPr lang="ro-RO" sz="2800" b="1" dirty="0"/>
+          </a:p>
+        </p:txBody>
+      </p:sp>
+    </p:spTree>
+    <p:extLst>
+      <p:ext uri="{BB962C8B-B14F-4D97-AF65-F5344CB8AC3E}">
+        <p14:creationId xmlns:p14="http://schemas.microsoft.com/office/powerpoint/2010/main" val="2371256947"/>
+      </p:ext>
+    </p:extLst>
+  </p:cSld>
+  <p:clrMapOvr>
+    <a:masterClrMapping/>
+  </p:clrMapOvr>
+</p:sld>
+</file>
+
+<file path=ppt/slides/slide11.xml><?xml version="1.0" encoding="utf-8"?>
+<p:sld xmlns:a="http://schemas.openxmlformats.org/drawingml/2006/main" xmlns:r="http://schemas.openxmlformats.org/officeDocument/2006/relationships" xmlns:p="http://schemas.openxmlformats.org/presentationml/2006/main">
+  <p:cSld>
+    <p:spTree>
+      <p:nvGrpSpPr>
+        <p:cNvPr id="1" name=""/>
+        <p:cNvGrpSpPr/>
+        <p:nvPr/>
+      </p:nvGrpSpPr>
+      <p:grpSpPr>
+        <a:xfrm>
+          <a:off x="0" y="0"/>
+          <a:ext cx="0" cy="0"/>
+          <a:chOff x="0" y="0"/>
+          <a:chExt cx="0" cy="0"/>
+        </a:xfrm>
+      </p:grpSpPr>
+      <p:pic>
+        <p:nvPicPr>
+          <p:cNvPr id="3" name="Picture 2" descr="A screenshot of a computer program&#10;&#10;AI-generated content may be incorrect.">
+            <a:extLst>
+              <a:ext uri="{FF2B5EF4-FFF2-40B4-BE49-F238E27FC236}">
+                <a16:creationId xmlns:a16="http://schemas.microsoft.com/office/drawing/2014/main" id="{1CB767FD-0FEA-C783-6303-91139F844534}"/>
+              </a:ext>
+            </a:extLst>
+          </p:cNvPr>
+          <p:cNvPicPr>
+            <a:picLocks noChangeAspect="1"/>
+          </p:cNvPicPr>
+          <p:nvPr/>
+        </p:nvPicPr>
+        <p:blipFill>
+          <a:blip r:embed="rId2"/>
+          <a:stretch>
+            <a:fillRect/>
+          </a:stretch>
+        </p:blipFill>
+        <p:spPr>
+          <a:xfrm>
+            <a:off x="0" y="0"/>
+            <a:ext cx="3668233" cy="6858000"/>
+          </a:xfrm>
+          <a:prstGeom prst="rect">
+            <a:avLst/>
+          </a:prstGeom>
+        </p:spPr>
+      </p:pic>
+      <p:sp>
+        <p:nvSpPr>
+          <p:cNvPr id="4" name="TextBox 3">
+            <a:extLst>
+              <a:ext uri="{FF2B5EF4-FFF2-40B4-BE49-F238E27FC236}">
+                <a16:creationId xmlns:a16="http://schemas.microsoft.com/office/drawing/2014/main" id="{7D8936D7-B3BB-C8DA-6549-F10E622CB34D}"/>
+              </a:ext>
+            </a:extLst>
+          </p:cNvPr>
+          <p:cNvSpPr txBox="1"/>
+          <p:nvPr/>
+        </p:nvSpPr>
+        <p:spPr>
+          <a:xfrm>
+            <a:off x="3668233" y="470773"/>
+            <a:ext cx="8375904" cy="6647974"/>
+          </a:xfrm>
+          <a:prstGeom prst="rect">
+            <a:avLst/>
+          </a:prstGeom>
+          <a:noFill/>
+        </p:spPr>
+        <p:txBody>
+          <a:bodyPr wrap="square" rtlCol="0">
+            <a:spAutoFit/>
+          </a:bodyPr>
+          <a:lstStyle/>
+          <a:p>
+            <a:r>
+              <a:rPr lang="en-US" sz="1400" b="1" dirty="0"/>
+              <a:t>n</a:t>
+            </a:r>
+            <a:r>
+              <a:rPr lang="ro-RO" sz="1400" b="1" dirty="0"/>
+              <a:t>ew_features</a:t>
+            </a:r>
+            <a:r>
+              <a:rPr lang="en-US" sz="1400" b="1" dirty="0"/>
+              <a:t>:</a:t>
+            </a:r>
+            <a:endParaRPr lang="ro-RO" sz="1400" b="1" dirty="0"/>
+          </a:p>
+          <a:p>
+            <a:r>
+              <a:rPr lang="ro-RO" sz="1400" dirty="0"/>
+              <a:t>Acest director contine seturile de date auxiliare si scripturile folosite pentru reconstructia, curatarea si unificarea indicatorilor macroeconomici utilizati ca variabile explicative in modelele de predictie a preturilor imobiliare.</a:t>
+            </a:r>
+            <a:endParaRPr lang="en-US" sz="1400" dirty="0"/>
+          </a:p>
+          <a:p>
+            <a:endParaRPr lang="en-US" sz="1400" dirty="0"/>
+          </a:p>
+          <a:p>
+            <a:r>
+              <a:rPr lang="ro-RO" sz="1400" b="1" dirty="0"/>
+              <a:t>merged_data</a:t>
+            </a:r>
+            <a:r>
+              <a:rPr lang="en-US" sz="1400" b="1" dirty="0"/>
+              <a:t>:</a:t>
+            </a:r>
+            <a:endParaRPr lang="ro-RO" sz="1400" b="1" dirty="0"/>
+          </a:p>
+          <a:p>
+            <a:r>
+              <a:rPr lang="ro-RO" sz="1400" dirty="0"/>
+              <a:t>Contine fisierele rezultate in urma imbinarilor finale ale tuturor indicatorilor economici utilizati in proiect. Aici sunt centralizate datele privind inflatia, costurile de constructie, dinamica urbana si PIB-ul, aliniate temporal si pregatite pentru antrenarea modelelor de predictie.</a:t>
+            </a:r>
+          </a:p>
+          <a:p>
+            <a:endParaRPr lang="ro-RO" sz="1400" dirty="0"/>
+          </a:p>
+          <a:p>
+            <a:r>
+              <a:rPr lang="it-IT" sz="1400" b="1" dirty="0"/>
+              <a:t>web_data/INFL:</a:t>
+            </a:r>
+          </a:p>
+          <a:p>
+            <a:r>
+              <a:rPr lang="ro-RO" sz="1400" dirty="0"/>
+              <a:t>Include date istorice si reconstruite privind inflatia, pentru perioada 1900–2025. Sunt utilizate atat date reale (post-1970), cat si serii estimate pentru intervalele fara informatii oficiale, impreuna cu scripturi de predictie si validare a evolutiei inflatiei.</a:t>
+            </a:r>
+            <a:endParaRPr lang="en-US" sz="1400" dirty="0"/>
+          </a:p>
+          <a:p>
+            <a:br>
+              <a:rPr lang="it-IT" sz="1400" dirty="0"/>
+            </a:br>
+            <a:r>
+              <a:rPr lang="ro-RO" sz="1400" b="1" dirty="0"/>
+              <a:t>web_data/mat_construct_increase</a:t>
+            </a:r>
+            <a:r>
+              <a:rPr lang="en-US" sz="1400" b="1" dirty="0"/>
+              <a:t>:</a:t>
+            </a:r>
+            <a:endParaRPr lang="ro-RO" sz="1400" b="1" dirty="0"/>
+          </a:p>
+          <a:p>
+            <a:r>
+              <a:rPr lang="ro-RO" sz="1400" dirty="0"/>
+              <a:t>Contine date si scripturi pentru reconstructia indicelui costurilor de constructie pe termen lung, inclusiv curatarea seriilor INS si generarea unei evolutii continue pentru perioada 1900–2025.</a:t>
+            </a:r>
+          </a:p>
+          <a:p>
+            <a:br>
+              <a:rPr lang="ro-RO" sz="1400" dirty="0"/>
+            </a:br>
+            <a:r>
+              <a:rPr lang="ro-RO" sz="1400" b="1" dirty="0"/>
+              <a:t>web_data/PIB</a:t>
+            </a:r>
+            <a:r>
+              <a:rPr lang="en-US" sz="1400" b="1" dirty="0"/>
+              <a:t>:</a:t>
+            </a:r>
+            <a:endParaRPr lang="ro-RO" sz="1400" b="1" dirty="0"/>
+          </a:p>
+          <a:p>
+            <a:r>
+              <a:rPr lang="ro-RO" sz="1400" dirty="0"/>
+              <a:t>Include date despre produsul intern brut la nivel regional (judetul Dolj si Oltenia). Sunt combinate surse reale (Eurostat, INS) cu serii generate pentru perioadele lipsa, rezultand o serie continua PIB 1900–2025 utilizata ca indicator al dezvoltarii economice locale.</a:t>
+            </a:r>
+            <a:endParaRPr lang="en-US" sz="1400" dirty="0"/>
+          </a:p>
+          <a:p>
+            <a:endParaRPr lang="en-US" sz="1400" dirty="0"/>
+          </a:p>
+          <a:p>
+            <a:r>
+              <a:rPr lang="ro-RO" sz="1400" b="1" dirty="0"/>
+              <a:t>web_data/URBAN_INCREASE</a:t>
+            </a:r>
+            <a:r>
+              <a:rPr lang="en-US" sz="1400" b="1" dirty="0"/>
+              <a:t>:</a:t>
+            </a:r>
+            <a:endParaRPr lang="ro-RO" sz="1400" b="1" dirty="0"/>
+          </a:p>
+          <a:p>
+            <a:r>
+              <a:rPr lang="ro-RO" sz="1400" dirty="0"/>
+              <a:t>Contine date privind evolutia populatiei urbane si a gradului de urbanizare in judetul Dolj. Seria este construita prin combinarea datelor INS cu estimari pentru perioadele istorice, reflectand presiunea urbana asupra pietei imobiliare.</a:t>
+            </a:r>
+            <a:br>
+              <a:rPr lang="ro-RO" dirty="0"/>
+            </a:br>
+            <a:endParaRPr lang="ro-RO" dirty="0"/>
+          </a:p>
+          <a:p>
+            <a:endParaRPr lang="ro-RO" dirty="0"/>
+          </a:p>
+        </p:txBody>
+      </p:sp>
+    </p:spTree>
+    <p:extLst>
+      <p:ext uri="{BB962C8B-B14F-4D97-AF65-F5344CB8AC3E}">
+        <p14:creationId xmlns:p14="http://schemas.microsoft.com/office/powerpoint/2010/main" val="461350761"/>
+      </p:ext>
+    </p:extLst>
+  </p:cSld>
+  <p:clrMapOvr>
+    <a:masterClrMapping/>
+  </p:clrMapOvr>
+</p:sld>
+</file>
+
+<file path=ppt/slides/slide12.xml><?xml version="1.0" encoding="utf-8"?>
+<p:sld xmlns:a="http://schemas.openxmlformats.org/drawingml/2006/main" xmlns:r="http://schemas.openxmlformats.org/officeDocument/2006/relationships" xmlns:p="http://schemas.openxmlformats.org/presentationml/2006/main">
+  <p:cSld>
+    <p:spTree>
+      <p:nvGrpSpPr>
+        <p:cNvPr id="1" name=""/>
+        <p:cNvGrpSpPr/>
+        <p:nvPr/>
+      </p:nvGrpSpPr>
+      <p:grpSpPr>
+        <a:xfrm>
+          <a:off x="0" y="0"/>
+          <a:ext cx="0" cy="0"/>
+          <a:chOff x="0" y="0"/>
+          <a:chExt cx="0" cy="0"/>
+        </a:xfrm>
+      </p:grpSpPr>
+      <p:pic>
+        <p:nvPicPr>
+          <p:cNvPr id="3" name="Picture 2" descr="A graph showing a line&#10;&#10;AI-generated content may be incorrect.">
+            <a:extLst>
+              <a:ext uri="{FF2B5EF4-FFF2-40B4-BE49-F238E27FC236}">
+                <a16:creationId xmlns:a16="http://schemas.microsoft.com/office/drawing/2014/main" id="{8D7F7DF3-3115-53D7-EBE6-EFE3283EB3CA}"/>
+              </a:ext>
+            </a:extLst>
+          </p:cNvPr>
+          <p:cNvPicPr>
+            <a:picLocks noChangeAspect="1"/>
+          </p:cNvPicPr>
+          <p:nvPr/>
+        </p:nvPicPr>
+        <p:blipFill>
+          <a:blip r:embed="rId2"/>
+          <a:stretch>
+            <a:fillRect/>
+          </a:stretch>
+        </p:blipFill>
+        <p:spPr>
+          <a:xfrm>
+            <a:off x="722376" y="1"/>
+            <a:ext cx="10460736" cy="4398264"/>
+          </a:xfrm>
+          <a:prstGeom prst="rect">
+            <a:avLst/>
+          </a:prstGeom>
+        </p:spPr>
+      </p:pic>
+      <p:sp>
+        <p:nvSpPr>
+          <p:cNvPr id="4" name="TextBox 3">
+            <a:extLst>
+              <a:ext uri="{FF2B5EF4-FFF2-40B4-BE49-F238E27FC236}">
+                <a16:creationId xmlns:a16="http://schemas.microsoft.com/office/drawing/2014/main" id="{94CD2870-01AE-33B5-30E2-3BC5279778D2}"/>
+              </a:ext>
+            </a:extLst>
+          </p:cNvPr>
+          <p:cNvSpPr txBox="1"/>
+          <p:nvPr/>
+        </p:nvSpPr>
+        <p:spPr>
+          <a:xfrm>
+            <a:off x="0" y="4334231"/>
+            <a:ext cx="12188952" cy="2523768"/>
+          </a:xfrm>
+          <a:prstGeom prst="rect">
+            <a:avLst/>
+          </a:prstGeom>
+          <a:noFill/>
+        </p:spPr>
+        <p:txBody>
+          <a:bodyPr wrap="square" rtlCol="0">
+            <a:spAutoFit/>
+          </a:bodyPr>
+          <a:lstStyle/>
+          <a:p>
+            <a:r>
+              <a:rPr lang="ro-RO" sz="1400" dirty="0"/>
+              <a:t>Pentru prognoza pretului pe metru patrat a fost adoptata o </a:t>
+            </a:r>
+            <a:r>
+              <a:rPr lang="ro-RO" sz="1400" b="1" dirty="0"/>
+              <a:t>abordare hibrida </a:t>
+            </a:r>
+            <a:r>
+              <a:rPr lang="ro-RO" sz="1400" dirty="0"/>
+              <a:t>care </a:t>
+            </a:r>
+            <a:r>
+              <a:rPr lang="ro-RO" sz="1400" b="1" dirty="0"/>
+              <a:t>combina un model de tip State Space cu un algoritm de invatare automata CatBoost</a:t>
+            </a:r>
+            <a:r>
+              <a:rPr lang="ro-RO" sz="1400" dirty="0"/>
+              <a:t>. Modelul State Space este utilizat pentru captarea trendului pe termen lung si a continuitatii structurale a seriei temporale, fiind capabil sa modeleze evolutii graduale si schimbari de nivel specifice proceselor economice. Acest model asigura o extrapolare stabila si economic plauzibila in afara intervalului de date observate.</a:t>
+            </a:r>
+            <a:endParaRPr lang="en-US" sz="1400" dirty="0"/>
+          </a:p>
+          <a:p>
+            <a:endParaRPr lang="ro-RO" sz="1400" dirty="0"/>
+          </a:p>
+          <a:p>
+            <a:r>
+              <a:rPr lang="ro-RO" sz="1400" dirty="0"/>
+              <a:t>CatBoost este utilizat complementar, fiind antrenat pe reziduurile modelului State Space. Rolul sau este de a surprinde relatiile neliniare si corectiile locale care nu pot fi modelate eficient printr-un model pur structural. Prin aceasta separare a rolurilor, CatBoost ajusteaza fin predictiile fara a distorsiona trendul global.</a:t>
+            </a:r>
+          </a:p>
+          <a:p>
+            <a:endParaRPr lang="en-US" dirty="0"/>
+          </a:p>
+          <a:p>
+            <a:r>
+              <a:rPr lang="ro-RO" sz="1400" dirty="0"/>
+              <a:t>Utilizarea exclusiva a modelului State Space permite obtinerea unor prognoze stabile si coerente din punct de vedere economic, insa acestea pot subestima dinamica accelerata a pietei in anumite perioade. Pe de alta parte, modelele de invatare automata aplicate individual tind sa ofere rezultate bune pe intervale scurte, dar pot genera extrapolari instabile sau regresii catre valori medii atunci cand sunt utilizate pentru prognoze pe termen lung. Abordarea hibrida propusa valorifica avantajele ambelor tipuri de modele, oferind prognoze robuste, consistente si adaptate evolutiei reale a pietei imobiliare.</a:t>
+            </a:r>
+          </a:p>
+        </p:txBody>
+      </p:sp>
+      <p:sp>
+        <p:nvSpPr>
+          <p:cNvPr id="5" name="TextBox 4">
+            <a:extLst>
+              <a:ext uri="{FF2B5EF4-FFF2-40B4-BE49-F238E27FC236}">
+                <a16:creationId xmlns:a16="http://schemas.microsoft.com/office/drawing/2014/main" id="{EB2ED6FF-8358-7BAD-C43A-7FAFE962D694}"/>
+              </a:ext>
+            </a:extLst>
+          </p:cNvPr>
+          <p:cNvSpPr txBox="1"/>
+          <p:nvPr/>
+        </p:nvSpPr>
+        <p:spPr>
+          <a:xfrm>
+            <a:off x="5799262" y="3429000"/>
+            <a:ext cx="5383850" cy="369332"/>
+          </a:xfrm>
+          <a:prstGeom prst="rect">
+            <a:avLst/>
+          </a:prstGeom>
+          <a:noFill/>
+        </p:spPr>
+        <p:txBody>
+          <a:bodyPr wrap="square" rtlCol="0">
+            <a:spAutoFit/>
+          </a:bodyPr>
+          <a:lstStyle/>
+          <a:p>
+            <a:r>
+              <a:rPr lang="it-IT" b="1" dirty="0"/>
+              <a:t>7. Modelarea si prognoza preturilor – abordare hibrida</a:t>
+            </a:r>
+            <a:endParaRPr lang="ro-RO" b="1" dirty="0"/>
+          </a:p>
+        </p:txBody>
+      </p:sp>
+    </p:spTree>
+    <p:extLst>
+      <p:ext uri="{BB962C8B-B14F-4D97-AF65-F5344CB8AC3E}">
+        <p14:creationId xmlns:p14="http://schemas.microsoft.com/office/powerpoint/2010/main" val="4250093860"/>
+      </p:ext>
+    </p:extLst>
+  </p:cSld>
+  <p:clrMapOvr>
+    <a:masterClrMapping/>
+  </p:clrMapOvr>
+</p:sld>
+</file>
+
+<file path=ppt/slides/slide13.xml><?xml version="1.0" encoding="utf-8"?>
+<p:sld xmlns:a="http://schemas.openxmlformats.org/drawingml/2006/main" xmlns:r="http://schemas.openxmlformats.org/officeDocument/2006/relationships" xmlns:p="http://schemas.openxmlformats.org/presentationml/2006/main">
+  <p:cSld>
+    <p:bg>
+      <p:bgPr>
+        <a:gradFill>
+          <a:gsLst>
+            <a:gs pos="0">
+              <a:srgbClr val="FF5D5D"/>
+            </a:gs>
+            <a:gs pos="74000">
+              <a:schemeClr val="accent1">
+                <a:lumMod val="45000"/>
+                <a:lumOff val="55000"/>
+              </a:schemeClr>
+            </a:gs>
+            <a:gs pos="83000">
+              <a:schemeClr val="accent1">
+                <a:lumMod val="45000"/>
+                <a:lumOff val="55000"/>
+              </a:schemeClr>
+            </a:gs>
+            <a:gs pos="100000">
+              <a:schemeClr val="accent1">
+                <a:lumMod val="30000"/>
+                <a:lumOff val="70000"/>
+              </a:schemeClr>
+            </a:gs>
+          </a:gsLst>
+          <a:lin ang="5400000" scaled="1"/>
+        </a:gradFill>
+        <a:effectLst/>
+      </p:bgPr>
+    </p:bg>
+    <p:spTree>
+      <p:nvGrpSpPr>
+        <p:cNvPr id="1" name=""/>
+        <p:cNvGrpSpPr/>
+        <p:nvPr/>
+      </p:nvGrpSpPr>
+      <p:grpSpPr>
+        <a:xfrm>
+          <a:off x="0" y="0"/>
+          <a:ext cx="0" cy="0"/>
+          <a:chOff x="0" y="0"/>
+          <a:chExt cx="0" cy="0"/>
+        </a:xfrm>
+      </p:grpSpPr>
+      <p:sp>
+        <p:nvSpPr>
+          <p:cNvPr id="2" name="TextBox 1">
+            <a:extLst>
+              <a:ext uri="{FF2B5EF4-FFF2-40B4-BE49-F238E27FC236}">
+                <a16:creationId xmlns:a16="http://schemas.microsoft.com/office/drawing/2014/main" id="{276D293B-8AA1-B6A2-02E4-27D6D27AFE96}"/>
+              </a:ext>
+            </a:extLst>
+          </p:cNvPr>
+          <p:cNvSpPr txBox="1"/>
+          <p:nvPr/>
+        </p:nvSpPr>
+        <p:spPr>
+          <a:xfrm>
+            <a:off x="1091380" y="1105287"/>
+            <a:ext cx="10009240" cy="4647426"/>
+          </a:xfrm>
+          <a:prstGeom prst="rect">
+            <a:avLst/>
+          </a:prstGeom>
+          <a:noFill/>
+        </p:spPr>
+        <p:txBody>
+          <a:bodyPr wrap="square" rtlCol="0">
+            <a:spAutoFit/>
+          </a:bodyPr>
+          <a:lstStyle/>
+          <a:p>
+            <a:r>
+              <a:rPr lang="en-US" sz="3600" b="1" i="1" dirty="0"/>
+              <a:t>8. Modul de </a:t>
+            </a:r>
+            <a:r>
+              <a:rPr lang="en-US" sz="3600" b="1" i="1" dirty="0" err="1"/>
+              <a:t>vizualizare</a:t>
+            </a:r>
+            <a:r>
+              <a:rPr lang="en-US" sz="3600" b="1" i="1" dirty="0"/>
+              <a:t> al </a:t>
+            </a:r>
+            <a:r>
+              <a:rPr lang="en-US" sz="3600" b="1" i="1" dirty="0" err="1"/>
+              <a:t>datelor</a:t>
+            </a:r>
+            <a:endParaRPr lang="en-US" sz="3600" b="1" i="1" dirty="0"/>
+          </a:p>
+          <a:p>
+            <a:pPr marL="514350" indent="-514350">
+              <a:buAutoNum type="arabicPeriod" startAt="7"/>
+            </a:pPr>
+            <a:endParaRPr lang="en-US" sz="2800" b="1" dirty="0"/>
+          </a:p>
+          <a:p>
+            <a:pPr marL="514350" indent="-514350">
+              <a:buAutoNum type="arabicPeriod" startAt="7"/>
+            </a:pPr>
+            <a:endParaRPr lang="en-US" sz="2800" b="1" dirty="0"/>
+          </a:p>
+          <a:p>
+            <a:r>
+              <a:rPr lang="en-US" sz="2800" b="1" dirty="0"/>
+              <a:t>	   </a:t>
+            </a:r>
+            <a:r>
+              <a:rPr lang="en-US" sz="2400" dirty="0"/>
+              <a:t>Modul de </a:t>
+            </a:r>
+            <a:r>
+              <a:rPr lang="en-US" sz="2400" dirty="0" err="1"/>
+              <a:t>vizualizare</a:t>
+            </a:r>
+            <a:r>
+              <a:rPr lang="en-US" sz="2400" dirty="0"/>
+              <a:t> al </a:t>
+            </a:r>
+            <a:r>
+              <a:rPr lang="en-US" sz="2400" dirty="0" err="1"/>
+              <a:t>datelor</a:t>
+            </a:r>
+            <a:r>
+              <a:rPr lang="en-US" sz="2400" dirty="0"/>
+              <a:t> se </a:t>
+            </a:r>
+            <a:r>
+              <a:rPr lang="en-US" sz="2400" dirty="0" err="1"/>
+              <a:t>realizeaza</a:t>
+            </a:r>
+            <a:r>
+              <a:rPr lang="en-US" sz="2400" dirty="0"/>
+              <a:t> </a:t>
+            </a:r>
+            <a:r>
+              <a:rPr lang="en-US" sz="2400" dirty="0" err="1"/>
+              <a:t>prin</a:t>
+            </a:r>
+            <a:r>
+              <a:rPr lang="en-US" sz="2400" dirty="0"/>
+              <a:t> </a:t>
+            </a:r>
+            <a:r>
+              <a:rPr lang="en-US" sz="2400" dirty="0" err="1"/>
+              <a:t>modulul</a:t>
+            </a:r>
+            <a:r>
+              <a:rPr lang="en-US" sz="2400" dirty="0"/>
+              <a:t> de     </a:t>
+            </a:r>
+            <a:r>
+              <a:rPr lang="en-US" sz="2400" dirty="0" err="1"/>
+              <a:t>interfete</a:t>
+            </a:r>
+            <a:r>
+              <a:rPr lang="en-US" sz="2400" dirty="0"/>
+              <a:t> WEB </a:t>
+            </a:r>
+            <a:r>
+              <a:rPr lang="en-US" sz="2400" dirty="0" err="1"/>
+              <a:t>streamlit</a:t>
+            </a:r>
+            <a:r>
+              <a:rPr lang="en-US" sz="2400" dirty="0"/>
+              <a:t>, care ne </a:t>
+            </a:r>
+            <a:r>
+              <a:rPr lang="en-US" sz="2400" dirty="0" err="1"/>
+              <a:t>permite</a:t>
+            </a:r>
+            <a:r>
+              <a:rPr lang="en-US" sz="2400" dirty="0"/>
+              <a:t> </a:t>
+            </a:r>
+            <a:r>
+              <a:rPr lang="en-US" sz="2400" dirty="0" err="1"/>
+              <a:t>accesarea</a:t>
+            </a:r>
+            <a:r>
+              <a:rPr lang="en-US" sz="2400" dirty="0"/>
+              <a:t> </a:t>
+            </a:r>
+            <a:r>
+              <a:rPr lang="en-US" sz="2400" dirty="0" err="1"/>
+              <a:t>datelor</a:t>
+            </a:r>
+            <a:r>
+              <a:rPr lang="en-US" sz="2400" dirty="0"/>
+              <a:t> in browser. </a:t>
+            </a:r>
+          </a:p>
+          <a:p>
+            <a:endParaRPr lang="en-US" sz="2400" dirty="0"/>
+          </a:p>
+          <a:p>
+            <a:r>
+              <a:rPr lang="en-US" sz="2400" dirty="0"/>
+              <a:t>	Intreg </a:t>
+            </a:r>
+            <a:r>
+              <a:rPr lang="en-US" sz="2400" dirty="0" err="1"/>
+              <a:t>proiectul</a:t>
+            </a:r>
+            <a:r>
+              <a:rPr lang="en-US" sz="2400" dirty="0"/>
+              <a:t> a </a:t>
+            </a:r>
+            <a:r>
+              <a:rPr lang="en-US" sz="2400" dirty="0" err="1"/>
+              <a:t>fost</a:t>
+            </a:r>
+            <a:r>
+              <a:rPr lang="en-US" sz="2400" dirty="0"/>
+              <a:t> </a:t>
+            </a:r>
+            <a:r>
+              <a:rPr lang="en-US" sz="2400" dirty="0" err="1"/>
+              <a:t>incarcat</a:t>
+            </a:r>
+            <a:r>
+              <a:rPr lang="en-US" sz="2400" dirty="0"/>
+              <a:t> pe </a:t>
+            </a:r>
+            <a:r>
+              <a:rPr lang="en-US" sz="2400" dirty="0" err="1"/>
+              <a:t>contul</a:t>
+            </a:r>
+            <a:r>
+              <a:rPr lang="en-US" sz="2400" dirty="0"/>
+              <a:t> personal de </a:t>
+            </a:r>
+            <a:r>
+              <a:rPr lang="en-US" sz="2400" dirty="0" err="1"/>
+              <a:t>github</a:t>
+            </a:r>
+            <a:r>
+              <a:rPr lang="en-US" sz="2400" dirty="0"/>
+              <a:t> </a:t>
+            </a:r>
+            <a:r>
+              <a:rPr lang="en-US" sz="2400" dirty="0" err="1"/>
+              <a:t>si</a:t>
+            </a:r>
+            <a:r>
+              <a:rPr lang="en-US" sz="2400" dirty="0"/>
+              <a:t> </a:t>
+            </a:r>
+            <a:r>
+              <a:rPr lang="en-US" sz="2400" dirty="0" err="1"/>
+              <a:t>apoi</a:t>
+            </a:r>
+            <a:r>
+              <a:rPr lang="en-US" sz="2400" dirty="0"/>
+              <a:t>, host-</a:t>
+            </a:r>
+            <a:r>
+              <a:rPr lang="en-US" sz="2400" dirty="0" err="1"/>
+              <a:t>uit</a:t>
+            </a:r>
+            <a:r>
+              <a:rPr lang="en-US" sz="2400" dirty="0"/>
+              <a:t> pe </a:t>
+            </a:r>
+            <a:r>
+              <a:rPr lang="en-US" sz="2400" dirty="0" err="1"/>
+              <a:t>platforma</a:t>
+            </a:r>
+            <a:r>
+              <a:rPr lang="en-US" sz="2400" dirty="0"/>
+              <a:t> </a:t>
+            </a:r>
+            <a:r>
+              <a:rPr lang="en-US" sz="2400" dirty="0" err="1"/>
+              <a:t>celor</a:t>
+            </a:r>
+            <a:r>
+              <a:rPr lang="en-US" sz="2400" dirty="0"/>
+              <a:t> de la </a:t>
+            </a:r>
+            <a:r>
+              <a:rPr lang="en-US" sz="2400" dirty="0" err="1"/>
+              <a:t>streamlit</a:t>
+            </a:r>
+            <a:r>
+              <a:rPr lang="en-US" sz="2400" dirty="0"/>
+              <a:t>.</a:t>
+            </a:r>
+          </a:p>
+          <a:p>
+            <a:endParaRPr lang="en-US" sz="2400" dirty="0"/>
+          </a:p>
+          <a:p>
+            <a:endParaRPr lang="en-US" sz="2800" b="1" dirty="0"/>
+          </a:p>
+          <a:p>
+            <a:r>
+              <a:rPr lang="en-US" sz="2400" dirty="0"/>
+              <a:t>Link-ul </a:t>
+            </a:r>
+            <a:r>
+              <a:rPr lang="en-US" sz="2400" dirty="0" err="1"/>
+              <a:t>aplicatiei</a:t>
+            </a:r>
+            <a:r>
+              <a:rPr lang="en-US" sz="2400" dirty="0"/>
+              <a:t>: </a:t>
+            </a:r>
+            <a:r>
+              <a:rPr lang="en-US" sz="2800" b="1" dirty="0">
+                <a:hlinkClick r:id="rId2"/>
+              </a:rPr>
+              <a:t>https://craiova-apart-predict.streamlit.app/</a:t>
+            </a:r>
+            <a:endParaRPr lang="en-US" sz="2800" b="1" dirty="0"/>
+          </a:p>
+        </p:txBody>
+      </p:sp>
+    </p:spTree>
+    <p:extLst>
+      <p:ext uri="{BB962C8B-B14F-4D97-AF65-F5344CB8AC3E}">
+        <p14:creationId xmlns:p14="http://schemas.microsoft.com/office/powerpoint/2010/main" val="3643817301"/>
+      </p:ext>
+    </p:extLst>
+  </p:cSld>
+  <p:clrMapOvr>
+    <a:masterClrMapping/>
+  </p:clrMapOvr>
+</p:sld>
+</file>
+
+<file path=ppt/slides/slide14.xml><?xml version="1.0" encoding="utf-8"?>
+<p:sld xmlns:a="http://schemas.openxmlformats.org/drawingml/2006/main" xmlns:r="http://schemas.openxmlformats.org/officeDocument/2006/relationships" xmlns:p="http://schemas.openxmlformats.org/presentationml/2006/main">
+  <p:cSld>
+    <p:bg>
+      <p:bgPr>
+        <a:gradFill>
+          <a:gsLst>
+            <a:gs pos="0">
+              <a:schemeClr val="accent4">
+                <a:lumMod val="40000"/>
+                <a:lumOff val="60000"/>
+              </a:schemeClr>
+            </a:gs>
+            <a:gs pos="74000">
+              <a:schemeClr val="accent1">
+                <a:lumMod val="45000"/>
+                <a:lumOff val="55000"/>
+              </a:schemeClr>
+            </a:gs>
+            <a:gs pos="83000">
+              <a:schemeClr val="accent1">
+                <a:lumMod val="45000"/>
+                <a:lumOff val="55000"/>
+              </a:schemeClr>
+            </a:gs>
+            <a:gs pos="100000">
+              <a:schemeClr val="accent1">
+                <a:lumMod val="30000"/>
+                <a:lumOff val="70000"/>
+              </a:schemeClr>
+            </a:gs>
+          </a:gsLst>
+          <a:lin ang="5400000" scaled="1"/>
+        </a:gradFill>
+        <a:effectLst/>
+      </p:bgPr>
+    </p:bg>
+    <p:spTree>
+      <p:nvGrpSpPr>
+        <p:cNvPr id="1" name=""/>
+        <p:cNvGrpSpPr/>
+        <p:nvPr/>
+      </p:nvGrpSpPr>
+      <p:grpSpPr>
+        <a:xfrm>
+          <a:off x="0" y="0"/>
+          <a:ext cx="0" cy="0"/>
+          <a:chOff x="0" y="0"/>
+          <a:chExt cx="0" cy="0"/>
+        </a:xfrm>
+      </p:grpSpPr>
+      <p:sp>
+        <p:nvSpPr>
+          <p:cNvPr id="3" name="TextBox 2">
+            <a:extLst>
+              <a:ext uri="{FF2B5EF4-FFF2-40B4-BE49-F238E27FC236}">
+                <a16:creationId xmlns:a16="http://schemas.microsoft.com/office/drawing/2014/main" id="{4CAC11B4-C123-5A09-5E72-BFB898A3EDC0}"/>
+              </a:ext>
+            </a:extLst>
+          </p:cNvPr>
+          <p:cNvSpPr txBox="1"/>
+          <p:nvPr/>
+        </p:nvSpPr>
+        <p:spPr>
+          <a:xfrm>
+            <a:off x="757083" y="597455"/>
+            <a:ext cx="8367252" cy="5663089"/>
+          </a:xfrm>
+          <a:prstGeom prst="rect">
+            <a:avLst/>
+          </a:prstGeom>
+          <a:noFill/>
+        </p:spPr>
+        <p:txBody>
+          <a:bodyPr wrap="square">
+            <a:spAutoFit/>
+          </a:bodyPr>
+          <a:lstStyle/>
+          <a:p>
+            <a:pPr>
+              <a:buNone/>
+            </a:pPr>
+            <a:r>
+              <a:rPr lang="en-US" sz="4000" b="1" i="1" dirty="0"/>
+              <a:t>9. </a:t>
+            </a:r>
+            <a:r>
+              <a:rPr lang="ro-RO" sz="4000" b="1" i="1" dirty="0"/>
+              <a:t>Probleme </a:t>
+            </a:r>
+            <a:r>
+              <a:rPr lang="en-US" sz="4000" b="1" i="1" dirty="0" err="1"/>
+              <a:t>i</a:t>
+            </a:r>
+            <a:r>
+              <a:rPr lang="ro-RO" sz="4000" b="1" i="1" dirty="0"/>
+              <a:t>nt</a:t>
+            </a:r>
+            <a:r>
+              <a:rPr lang="en-US" sz="4000" b="1" i="1" dirty="0"/>
+              <a:t>a</a:t>
+            </a:r>
+            <a:r>
+              <a:rPr lang="ro-RO" sz="4000" b="1" i="1" dirty="0"/>
+              <a:t>lnite </a:t>
+            </a:r>
+            <a:r>
+              <a:rPr lang="en-US" sz="4000" b="1" i="1" dirty="0"/>
+              <a:t>s</a:t>
+            </a:r>
+            <a:r>
+              <a:rPr lang="ro-RO" sz="4000" b="1" i="1" dirty="0"/>
+              <a:t>i solu</a:t>
+            </a:r>
+            <a:r>
+              <a:rPr lang="en-US" sz="4000" b="1" i="1" dirty="0"/>
+              <a:t>t</a:t>
+            </a:r>
+            <a:r>
+              <a:rPr lang="ro-RO" sz="4000" b="1" i="1" dirty="0"/>
+              <a:t>ii</a:t>
+            </a:r>
+            <a:endParaRPr lang="en-US" sz="4000" b="1" i="1" dirty="0"/>
+          </a:p>
+          <a:p>
+            <a:pPr>
+              <a:buNone/>
+            </a:pPr>
+            <a:endParaRPr lang="en-US" sz="4000" b="1" i="1" dirty="0"/>
+          </a:p>
+          <a:p>
+            <a:pPr>
+              <a:buNone/>
+            </a:pPr>
+            <a:endParaRPr lang="ro-RO" b="1" dirty="0"/>
+          </a:p>
+          <a:p>
+            <a:pPr lvl="1"/>
+            <a:r>
+              <a:rPr lang="ro-RO" sz="2400" b="1" dirty="0"/>
+              <a:t>Probleme </a:t>
+            </a:r>
+            <a:r>
+              <a:rPr lang="en-US" sz="2400" b="1" dirty="0" err="1"/>
+              <a:t>i</a:t>
+            </a:r>
+            <a:r>
+              <a:rPr lang="ro-RO" sz="2400" b="1" dirty="0"/>
+              <a:t>nt</a:t>
+            </a:r>
+            <a:r>
+              <a:rPr lang="en-US" sz="2400" b="1" dirty="0"/>
+              <a:t>a</a:t>
+            </a:r>
+            <a:r>
+              <a:rPr lang="ro-RO" sz="2400" b="1" dirty="0"/>
+              <a:t>lnite</a:t>
+            </a:r>
+            <a:endParaRPr lang="ro-RO" sz="2400" dirty="0"/>
+          </a:p>
+          <a:p>
+            <a:pPr lvl="1">
+              <a:buFont typeface="Arial" panose="020B0604020202020204" pitchFamily="34" charset="0"/>
+              <a:buChar char="•"/>
+            </a:pPr>
+            <a:r>
+              <a:rPr lang="en-US" sz="2400" dirty="0"/>
+              <a:t> </a:t>
+            </a:r>
+            <a:r>
+              <a:rPr lang="ro-RO" sz="2400" dirty="0"/>
+              <a:t>Lipsa datelor istorice </a:t>
+            </a:r>
+            <a:r>
+              <a:rPr lang="en-US" sz="2400" dirty="0" err="1"/>
+              <a:t>i</a:t>
+            </a:r>
+            <a:r>
+              <a:rPr lang="ro-RO" sz="2400" dirty="0"/>
+              <a:t>nainte de 2012</a:t>
+            </a:r>
+          </a:p>
+          <a:p>
+            <a:pPr lvl="1">
+              <a:buFont typeface="Arial" panose="020B0604020202020204" pitchFamily="34" charset="0"/>
+              <a:buChar char="•"/>
+            </a:pPr>
+            <a:r>
+              <a:rPr lang="en-US" sz="2400" dirty="0"/>
+              <a:t> </a:t>
+            </a:r>
+            <a:r>
+              <a:rPr lang="ro-RO" sz="2400" dirty="0"/>
+              <a:t>Trecerea de la ROL la RON</a:t>
+            </a:r>
+          </a:p>
+          <a:p>
+            <a:pPr lvl="1">
+              <a:buFont typeface="Arial" panose="020B0604020202020204" pitchFamily="34" charset="0"/>
+              <a:buChar char="•"/>
+            </a:pPr>
+            <a:r>
+              <a:rPr lang="en-US" sz="2400" dirty="0"/>
+              <a:t> </a:t>
+            </a:r>
+            <a:r>
+              <a:rPr lang="ro-RO" sz="2400" dirty="0"/>
+              <a:t>Schimb</a:t>
+            </a:r>
+            <a:r>
+              <a:rPr lang="en-US" sz="2400" dirty="0"/>
+              <a:t>a</a:t>
+            </a:r>
+            <a:r>
+              <a:rPr lang="ro-RO" sz="2400" dirty="0"/>
+              <a:t>ri economice majore pe termen lung</a:t>
+            </a:r>
+          </a:p>
+          <a:p>
+            <a:pPr lvl="1">
+              <a:buFont typeface="Arial" panose="020B0604020202020204" pitchFamily="34" charset="0"/>
+              <a:buChar char="•"/>
+            </a:pPr>
+            <a:r>
+              <a:rPr lang="en-US" sz="2400" dirty="0"/>
+              <a:t> </a:t>
+            </a:r>
+            <a:r>
+              <a:rPr lang="ro-RO" sz="2400" dirty="0"/>
+              <a:t>Zgomot </a:t>
+            </a:r>
+            <a:r>
+              <a:rPr lang="en-US" sz="2400" dirty="0"/>
+              <a:t>s</a:t>
+            </a:r>
+            <a:r>
+              <a:rPr lang="ro-RO" sz="2400" dirty="0"/>
+              <a:t>i inconsisten</a:t>
+            </a:r>
+            <a:r>
+              <a:rPr lang="en-US" sz="2400" dirty="0"/>
+              <a:t>t</a:t>
+            </a:r>
+            <a:r>
+              <a:rPr lang="ro-RO" sz="2400" dirty="0"/>
+              <a:t>e </a:t>
+            </a:r>
+            <a:r>
+              <a:rPr lang="en-US" sz="2400" dirty="0"/>
+              <a:t>i</a:t>
+            </a:r>
+            <a:r>
+              <a:rPr lang="ro-RO" sz="2400" dirty="0"/>
+              <a:t>n seturile de date</a:t>
+            </a:r>
+            <a:endParaRPr lang="en-US" sz="2400" dirty="0"/>
+          </a:p>
+          <a:p>
+            <a:pPr lvl="1"/>
+            <a:endParaRPr lang="ro-RO" sz="2400" dirty="0"/>
+          </a:p>
+          <a:p>
+            <a:pPr lvl="1"/>
+            <a:r>
+              <a:rPr lang="ro-RO" sz="2400" b="1" dirty="0"/>
+              <a:t>Solu</a:t>
+            </a:r>
+            <a:r>
+              <a:rPr lang="en-US" sz="2400" b="1" dirty="0"/>
+              <a:t>t</a:t>
+            </a:r>
+            <a:r>
+              <a:rPr lang="ro-RO" sz="2400" b="1" dirty="0"/>
+              <a:t>ii aplicate</a:t>
+            </a:r>
+            <a:endParaRPr lang="ro-RO" sz="2400" dirty="0"/>
+          </a:p>
+          <a:p>
+            <a:pPr lvl="1">
+              <a:buFont typeface="Arial" panose="020B0604020202020204" pitchFamily="34" charset="0"/>
+              <a:buChar char="•"/>
+            </a:pPr>
+            <a:r>
+              <a:rPr lang="en-US" sz="2400" dirty="0"/>
+              <a:t> </a:t>
+            </a:r>
+            <a:r>
+              <a:rPr lang="ro-RO" sz="2400" dirty="0"/>
+              <a:t>Generare de date sintetice calibrate pe date reale</a:t>
+            </a:r>
+          </a:p>
+          <a:p>
+            <a:pPr lvl="1">
+              <a:buFont typeface="Arial" panose="020B0604020202020204" pitchFamily="34" charset="0"/>
+              <a:buChar char="•"/>
+            </a:pPr>
+            <a:r>
+              <a:rPr lang="en-US" sz="2400" dirty="0"/>
+              <a:t> </a:t>
+            </a:r>
+            <a:r>
+              <a:rPr lang="ro-RO" sz="2400" dirty="0"/>
+              <a:t>Normalizare folosind infla</a:t>
+            </a:r>
+            <a:r>
+              <a:rPr lang="en-US" sz="2400" dirty="0"/>
+              <a:t>t</a:t>
+            </a:r>
+            <a:r>
+              <a:rPr lang="ro-RO" sz="2400" dirty="0"/>
+              <a:t>ia </a:t>
+            </a:r>
+            <a:r>
+              <a:rPr lang="en-US" sz="2400" dirty="0"/>
+              <a:t>s</a:t>
+            </a:r>
+            <a:r>
+              <a:rPr lang="ro-RO" sz="2400" dirty="0"/>
+              <a:t>i salariile</a:t>
+            </a:r>
+          </a:p>
+          <a:p>
+            <a:pPr lvl="1">
+              <a:buFont typeface="Arial" panose="020B0604020202020204" pitchFamily="34" charset="0"/>
+              <a:buChar char="•"/>
+            </a:pPr>
+            <a:r>
+              <a:rPr lang="en-US" sz="2400" dirty="0"/>
+              <a:t> </a:t>
+            </a:r>
+            <a:r>
+              <a:rPr lang="ro-RO" sz="2400" dirty="0"/>
+              <a:t>Impunerea unor constr</a:t>
+            </a:r>
+            <a:r>
+              <a:rPr lang="en-US" sz="2400" dirty="0"/>
+              <a:t>a</a:t>
+            </a:r>
+            <a:r>
+              <a:rPr lang="ro-RO" sz="2400" dirty="0"/>
+              <a:t>ngeri economice </a:t>
+            </a:r>
+            <a:r>
+              <a:rPr lang="en-US" sz="2400" dirty="0"/>
+              <a:t>s</a:t>
+            </a:r>
+            <a:r>
+              <a:rPr lang="ro-RO" sz="2400" dirty="0"/>
+              <a:t>i smoothing</a:t>
+            </a:r>
+          </a:p>
+          <a:p>
+            <a:pPr lvl="1">
+              <a:buFont typeface="Arial" panose="020B0604020202020204" pitchFamily="34" charset="0"/>
+              <a:buChar char="•"/>
+            </a:pPr>
+            <a:r>
+              <a:rPr lang="en-US" sz="2400" dirty="0"/>
+              <a:t> </a:t>
+            </a:r>
+            <a:r>
+              <a:rPr lang="ro-RO" sz="2400" dirty="0"/>
+              <a:t>Cur</a:t>
+            </a:r>
+            <a:r>
+              <a:rPr lang="en-US" sz="2400" dirty="0"/>
+              <a:t>at</a:t>
+            </a:r>
+            <a:r>
+              <a:rPr lang="ro-RO" sz="2400" dirty="0"/>
+              <a:t>are, validare </a:t>
+            </a:r>
+            <a:r>
+              <a:rPr lang="en-US" sz="2400" dirty="0"/>
+              <a:t>s</a:t>
+            </a:r>
+            <a:r>
+              <a:rPr lang="ro-RO" sz="2400" dirty="0"/>
+              <a:t>i control al datelor</a:t>
+            </a:r>
+          </a:p>
+        </p:txBody>
+      </p:sp>
+    </p:spTree>
+    <p:extLst>
+      <p:ext uri="{BB962C8B-B14F-4D97-AF65-F5344CB8AC3E}">
+        <p14:creationId xmlns:p14="http://schemas.microsoft.com/office/powerpoint/2010/main" val="2934249572"/>
+      </p:ext>
+    </p:extLst>
+  </p:cSld>
+  <p:clrMapOvr>
+    <a:masterClrMapping/>
+  </p:clrMapOvr>
+</p:sld>
+</file>
+
+<file path=ppt/slides/slide15.xml><?xml version="1.0" encoding="utf-8"?>
+<p:sld xmlns:a="http://schemas.openxmlformats.org/drawingml/2006/main" xmlns:r="http://schemas.openxmlformats.org/officeDocument/2006/relationships" xmlns:p="http://schemas.openxmlformats.org/presentationml/2006/main">
+  <p:cSld>
+    <p:bg>
+      <p:bgPr>
+        <a:gradFill>
+          <a:gsLst>
+            <a:gs pos="0">
+              <a:schemeClr val="accent2">
+                <a:lumMod val="20000"/>
+                <a:lumOff val="80000"/>
+              </a:schemeClr>
+            </a:gs>
+            <a:gs pos="74000">
+              <a:schemeClr val="accent1">
+                <a:lumMod val="45000"/>
+                <a:lumOff val="55000"/>
+              </a:schemeClr>
+            </a:gs>
+            <a:gs pos="83000">
+              <a:schemeClr val="accent1">
+                <a:lumMod val="45000"/>
+                <a:lumOff val="55000"/>
+              </a:schemeClr>
+            </a:gs>
+            <a:gs pos="100000">
+              <a:schemeClr val="accent1">
+                <a:lumMod val="30000"/>
+                <a:lumOff val="70000"/>
+              </a:schemeClr>
+            </a:gs>
+          </a:gsLst>
+          <a:lin ang="5400000" scaled="1"/>
+        </a:gradFill>
+        <a:effectLst/>
+      </p:bgPr>
+    </p:bg>
+    <p:spTree>
+      <p:nvGrpSpPr>
+        <p:cNvPr id="1" name=""/>
+        <p:cNvGrpSpPr/>
+        <p:nvPr/>
+      </p:nvGrpSpPr>
+      <p:grpSpPr>
+        <a:xfrm>
+          <a:off x="0" y="0"/>
+          <a:ext cx="0" cy="0"/>
+          <a:chOff x="0" y="0"/>
+          <a:chExt cx="0" cy="0"/>
+        </a:xfrm>
+      </p:grpSpPr>
+      <p:sp>
+        <p:nvSpPr>
+          <p:cNvPr id="3" name="TextBox 2">
+            <a:extLst>
+              <a:ext uri="{FF2B5EF4-FFF2-40B4-BE49-F238E27FC236}">
+                <a16:creationId xmlns:a16="http://schemas.microsoft.com/office/drawing/2014/main" id="{3A33C136-E8F0-C17A-133F-37279D12AC97}"/>
+              </a:ext>
+            </a:extLst>
+          </p:cNvPr>
+          <p:cNvSpPr txBox="1"/>
+          <p:nvPr/>
+        </p:nvSpPr>
+        <p:spPr>
+          <a:xfrm>
+            <a:off x="953729" y="1336119"/>
+            <a:ext cx="9832258" cy="3836115"/>
+          </a:xfrm>
+          <a:prstGeom prst="rect">
+            <a:avLst/>
+          </a:prstGeom>
+          <a:noFill/>
+        </p:spPr>
+        <p:txBody>
+          <a:bodyPr wrap="square">
+            <a:spAutoFit/>
+          </a:bodyPr>
+          <a:lstStyle/>
+          <a:p>
+            <a:pPr>
+              <a:buNone/>
+            </a:pPr>
+            <a:r>
+              <a:rPr lang="en-US" sz="4000" b="1" i="1" dirty="0"/>
+              <a:t>10. </a:t>
+            </a:r>
+            <a:r>
+              <a:rPr lang="ro-RO" sz="4000" b="1" i="1" dirty="0"/>
+              <a:t>Planuri de dezvoltare viitoare</a:t>
+            </a:r>
+            <a:endParaRPr lang="en-US" sz="4000" b="1" i="1" dirty="0"/>
+          </a:p>
+          <a:p>
+            <a:pPr>
+              <a:buNone/>
+            </a:pPr>
+            <a:endParaRPr lang="ro-RO" b="1" dirty="0"/>
+          </a:p>
+          <a:p>
+            <a:pPr>
+              <a:lnSpc>
+                <a:spcPct val="200000"/>
+              </a:lnSpc>
+              <a:buFont typeface="Arial" panose="020B0604020202020204" pitchFamily="34" charset="0"/>
+              <a:buChar char="•"/>
+            </a:pPr>
+            <a:r>
+              <a:rPr lang="en-US" sz="2400" dirty="0"/>
+              <a:t> </a:t>
+            </a:r>
+            <a:r>
+              <a:rPr lang="ro-RO" sz="2400" dirty="0"/>
+              <a:t>Integrarea unor indicatori economici oficiali (INS, Eurostat)</a:t>
+            </a:r>
+          </a:p>
+          <a:p>
+            <a:pPr>
+              <a:lnSpc>
+                <a:spcPct val="200000"/>
+              </a:lnSpc>
+              <a:buFont typeface="Arial" panose="020B0604020202020204" pitchFamily="34" charset="0"/>
+              <a:buChar char="•"/>
+            </a:pPr>
+            <a:r>
+              <a:rPr lang="en-US" sz="2400" dirty="0"/>
+              <a:t> I</a:t>
+            </a:r>
+            <a:r>
+              <a:rPr lang="ro-RO" sz="2400" dirty="0"/>
+              <a:t>mbun</a:t>
+            </a:r>
+            <a:r>
+              <a:rPr lang="en-US" sz="2400" dirty="0"/>
+              <a:t>a</a:t>
+            </a:r>
+            <a:r>
+              <a:rPr lang="ro-RO" sz="2400" dirty="0"/>
+              <a:t>t</a:t>
+            </a:r>
+            <a:r>
+              <a:rPr lang="en-US" sz="2400" dirty="0"/>
+              <a:t>at</a:t>
+            </a:r>
+            <a:r>
+              <a:rPr lang="ro-RO" sz="2400" dirty="0"/>
+              <a:t>irea modelelor de tip time-series (ARIMA, Prophet, LSTM)</a:t>
+            </a:r>
+          </a:p>
+          <a:p>
+            <a:pPr>
+              <a:lnSpc>
+                <a:spcPct val="200000"/>
+              </a:lnSpc>
+              <a:buFont typeface="Arial" panose="020B0604020202020204" pitchFamily="34" charset="0"/>
+              <a:buChar char="•"/>
+            </a:pPr>
+            <a:r>
+              <a:rPr lang="en-US" sz="2400" dirty="0"/>
+              <a:t> </a:t>
+            </a:r>
+            <a:r>
+              <a:rPr lang="ro-RO" sz="2400" dirty="0"/>
+              <a:t>Extinderea analizei la alte ora</a:t>
+            </a:r>
+            <a:r>
+              <a:rPr lang="en-US" sz="2400" dirty="0"/>
+              <a:t>s</a:t>
+            </a:r>
+            <a:r>
+              <a:rPr lang="ro-RO" sz="2400" dirty="0"/>
+              <a:t>e din Rom</a:t>
+            </a:r>
+            <a:r>
+              <a:rPr lang="en-US" sz="2400" dirty="0"/>
+              <a:t>a</a:t>
+            </a:r>
+            <a:r>
+              <a:rPr lang="ro-RO" sz="2400" dirty="0"/>
+              <a:t>nia</a:t>
+            </a:r>
+          </a:p>
+          <a:p>
+            <a:pPr>
+              <a:lnSpc>
+                <a:spcPct val="200000"/>
+              </a:lnSpc>
+              <a:buFont typeface="Arial" panose="020B0604020202020204" pitchFamily="34" charset="0"/>
+              <a:buChar char="•"/>
+            </a:pPr>
+            <a:r>
+              <a:rPr lang="en-US" sz="2400" dirty="0"/>
+              <a:t> </a:t>
+            </a:r>
+            <a:r>
+              <a:rPr lang="ro-RO" sz="2400" dirty="0"/>
+              <a:t>Dezvoltarea unui dashboard</a:t>
+            </a:r>
+            <a:r>
+              <a:rPr lang="en-US" sz="2400" dirty="0"/>
+              <a:t> </a:t>
+            </a:r>
+            <a:r>
+              <a:rPr lang="en-US" sz="2400" dirty="0" err="1"/>
+              <a:t>mult</a:t>
+            </a:r>
+            <a:r>
+              <a:rPr lang="en-US" sz="2400" dirty="0"/>
+              <a:t> </a:t>
+            </a:r>
+            <a:r>
+              <a:rPr lang="en-US" sz="2400" dirty="0" err="1"/>
+              <a:t>mai</a:t>
+            </a:r>
+            <a:r>
+              <a:rPr lang="ro-RO" sz="2400" dirty="0"/>
+              <a:t> interactiv pentru analiz</a:t>
+            </a:r>
+            <a:r>
+              <a:rPr lang="en-US" sz="2400" dirty="0"/>
+              <a:t>a</a:t>
+            </a:r>
+            <a:r>
+              <a:rPr lang="ro-RO" sz="2400" dirty="0"/>
+              <a:t> </a:t>
+            </a:r>
+            <a:r>
+              <a:rPr lang="en-US" sz="2400" dirty="0"/>
+              <a:t>s</a:t>
+            </a:r>
+            <a:r>
+              <a:rPr lang="ro-RO" sz="2400" dirty="0"/>
+              <a:t>i predic</a:t>
+            </a:r>
+            <a:r>
+              <a:rPr lang="en-US" sz="2400" dirty="0"/>
+              <a:t>t</a:t>
+            </a:r>
+            <a:r>
+              <a:rPr lang="ro-RO" sz="2400" dirty="0"/>
+              <a:t>ii</a:t>
+            </a:r>
+          </a:p>
+        </p:txBody>
+      </p:sp>
+    </p:spTree>
+    <p:extLst>
+      <p:ext uri="{BB962C8B-B14F-4D97-AF65-F5344CB8AC3E}">
+        <p14:creationId xmlns:p14="http://schemas.microsoft.com/office/powerpoint/2010/main" val="1497652311"/>
+      </p:ext>
+    </p:extLst>
+  </p:cSld>
+  <p:clrMapOvr>
+    <a:masterClrMapping/>
+  </p:clrMapOvr>
+</p:sld>
+</file>
+
+<file path=ppt/slides/slide16.xml><?xml version="1.0" encoding="utf-8"?>
+<p:sld xmlns:a="http://schemas.openxmlformats.org/drawingml/2006/main" xmlns:r="http://schemas.openxmlformats.org/officeDocument/2006/relationships" xmlns:p="http://schemas.openxmlformats.org/presentationml/2006/main">
+  <p:cSld>
+    <p:spTree>
+      <p:nvGrpSpPr>
+        <p:cNvPr id="1" name=""/>
+        <p:cNvGrpSpPr/>
+        <p:nvPr/>
+      </p:nvGrpSpPr>
+      <p:grpSpPr>
+        <a:xfrm>
+          <a:off x="0" y="0"/>
+          <a:ext cx="0" cy="0"/>
+          <a:chOff x="0" y="0"/>
+          <a:chExt cx="0" cy="0"/>
+        </a:xfrm>
+      </p:grpSpPr>
+      <p:sp>
+        <p:nvSpPr>
+          <p:cNvPr id="2" name="TextBox 1">
+            <a:extLst>
+              <a:ext uri="{FF2B5EF4-FFF2-40B4-BE49-F238E27FC236}">
                 <a16:creationId xmlns:a16="http://schemas.microsoft.com/office/drawing/2014/main" id="{E8C61907-0DC0-27E9-10DD-C6D2A92B8165}"/>
               </a:ext>
             </a:extLst>
@@ -3591,7 +5297,7 @@
           <a:p>
             <a:r>
               <a:rPr lang="en-US" sz="3200" b="1" dirty="0"/>
-              <a:t>WEBOGRAFIE</a:t>
+              <a:t>11. WEBOGRAFIE</a:t>
             </a:r>
             <a:endParaRPr lang="ro-RO" sz="3200" b="1" dirty="0"/>
           </a:p>
@@ -3836,7 +5542,424 @@
 </p:sld>
 </file>
 
+<file path=ppt/slides/slide17.xml><?xml version="1.0" encoding="utf-8"?>
+<p:sld xmlns:a="http://schemas.openxmlformats.org/drawingml/2006/main" xmlns:r="http://schemas.openxmlformats.org/officeDocument/2006/relationships" xmlns:p="http://schemas.openxmlformats.org/presentationml/2006/main">
+  <p:cSld>
+    <p:bg>
+      <p:bgPr>
+        <a:gradFill>
+          <a:gsLst>
+            <a:gs pos="0">
+              <a:schemeClr val="accent6">
+                <a:lumMod val="20000"/>
+                <a:lumOff val="80000"/>
+              </a:schemeClr>
+            </a:gs>
+            <a:gs pos="74000">
+              <a:schemeClr val="accent1">
+                <a:lumMod val="45000"/>
+                <a:lumOff val="55000"/>
+              </a:schemeClr>
+            </a:gs>
+            <a:gs pos="83000">
+              <a:schemeClr val="accent1">
+                <a:lumMod val="45000"/>
+                <a:lumOff val="55000"/>
+              </a:schemeClr>
+            </a:gs>
+            <a:gs pos="100000">
+              <a:schemeClr val="accent1">
+                <a:lumMod val="30000"/>
+                <a:lumOff val="70000"/>
+              </a:schemeClr>
+            </a:gs>
+          </a:gsLst>
+          <a:lin ang="5400000" scaled="1"/>
+        </a:gradFill>
+        <a:effectLst/>
+      </p:bgPr>
+    </p:bg>
+    <p:spTree>
+      <p:nvGrpSpPr>
+        <p:cNvPr id="1" name=""/>
+        <p:cNvGrpSpPr/>
+        <p:nvPr/>
+      </p:nvGrpSpPr>
+      <p:grpSpPr>
+        <a:xfrm>
+          <a:off x="0" y="0"/>
+          <a:ext cx="0" cy="0"/>
+          <a:chOff x="0" y="0"/>
+          <a:chExt cx="0" cy="0"/>
+        </a:xfrm>
+      </p:grpSpPr>
+      <p:sp>
+        <p:nvSpPr>
+          <p:cNvPr id="2" name="TextBox 1">
+            <a:extLst>
+              <a:ext uri="{FF2B5EF4-FFF2-40B4-BE49-F238E27FC236}">
+                <a16:creationId xmlns:a16="http://schemas.microsoft.com/office/drawing/2014/main" id="{AE4344E4-B356-962F-9898-F83D6BA82206}"/>
+              </a:ext>
+            </a:extLst>
+          </p:cNvPr>
+          <p:cNvSpPr txBox="1"/>
+          <p:nvPr/>
+        </p:nvSpPr>
+        <p:spPr>
+          <a:xfrm>
+            <a:off x="565355" y="2505670"/>
+            <a:ext cx="10412361" cy="923330"/>
+          </a:xfrm>
+          <a:prstGeom prst="rect">
+            <a:avLst/>
+          </a:prstGeom>
+          <a:noFill/>
+        </p:spPr>
+        <p:txBody>
+          <a:bodyPr wrap="square" rtlCol="0">
+            <a:spAutoFit/>
+          </a:bodyPr>
+          <a:lstStyle/>
+          <a:p>
+            <a:r>
+              <a:rPr lang="en-US" dirty="0"/>
+              <a:t>	</a:t>
+            </a:r>
+            <a:r>
+              <a:rPr lang="en-US" sz="5400" b="1" dirty="0"/>
+              <a:t>VA MULTUMESC  </a:t>
+            </a:r>
+            <a:r>
+              <a:rPr lang="en-US" sz="5400" b="1" dirty="0" err="1"/>
+              <a:t>pentru</a:t>
+            </a:r>
+            <a:r>
+              <a:rPr lang="en-US" sz="5400" b="1" dirty="0"/>
+              <a:t> </a:t>
+            </a:r>
+            <a:r>
+              <a:rPr lang="en-US" sz="5400" b="1" dirty="0" err="1"/>
+              <a:t>atentie</a:t>
+            </a:r>
+            <a:r>
+              <a:rPr lang="en-US" sz="5400" b="1" dirty="0"/>
+              <a:t>!</a:t>
+            </a:r>
+            <a:endParaRPr lang="ro-RO" b="1" dirty="0"/>
+          </a:p>
+        </p:txBody>
+      </p:sp>
+    </p:spTree>
+    <p:extLst>
+      <p:ext uri="{BB962C8B-B14F-4D97-AF65-F5344CB8AC3E}">
+        <p14:creationId xmlns:p14="http://schemas.microsoft.com/office/powerpoint/2010/main" val="99710571"/>
+      </p:ext>
+    </p:extLst>
+  </p:cSld>
+  <p:clrMapOvr>
+    <a:masterClrMapping/>
+  </p:clrMapOvr>
+</p:sld>
+</file>
+
 <file path=ppt/slides/slide2.xml><?xml version="1.0" encoding="utf-8"?>
+<p:sld xmlns:a="http://schemas.openxmlformats.org/drawingml/2006/main" xmlns:r="http://schemas.openxmlformats.org/officeDocument/2006/relationships" xmlns:p="http://schemas.openxmlformats.org/presentationml/2006/main">
+  <p:cSld>
+    <p:bg>
+      <p:bgPr>
+        <a:gradFill>
+          <a:gsLst>
+            <a:gs pos="0">
+              <a:schemeClr val="accent1">
+                <a:lumMod val="5000"/>
+                <a:lumOff val="95000"/>
+              </a:schemeClr>
+            </a:gs>
+            <a:gs pos="74000">
+              <a:schemeClr val="accent1">
+                <a:lumMod val="45000"/>
+                <a:lumOff val="55000"/>
+              </a:schemeClr>
+            </a:gs>
+            <a:gs pos="83000">
+              <a:schemeClr val="accent1">
+                <a:lumMod val="45000"/>
+                <a:lumOff val="55000"/>
+              </a:schemeClr>
+            </a:gs>
+            <a:gs pos="100000">
+              <a:schemeClr val="accent1">
+                <a:lumMod val="30000"/>
+                <a:lumOff val="70000"/>
+              </a:schemeClr>
+            </a:gs>
+          </a:gsLst>
+          <a:lin ang="5400000" scaled="1"/>
+        </a:gradFill>
+        <a:effectLst/>
+      </p:bgPr>
+    </p:bg>
+    <p:spTree>
+      <p:nvGrpSpPr>
+        <p:cNvPr id="1" name=""/>
+        <p:cNvGrpSpPr/>
+        <p:nvPr/>
+      </p:nvGrpSpPr>
+      <p:grpSpPr>
+        <a:xfrm>
+          <a:off x="0" y="0"/>
+          <a:ext cx="0" cy="0"/>
+          <a:chOff x="0" y="0"/>
+          <a:chExt cx="0" cy="0"/>
+        </a:xfrm>
+      </p:grpSpPr>
+      <p:sp>
+        <p:nvSpPr>
+          <p:cNvPr id="2" name="TextBox 1">
+            <a:extLst>
+              <a:ext uri="{FF2B5EF4-FFF2-40B4-BE49-F238E27FC236}">
+                <a16:creationId xmlns:a16="http://schemas.microsoft.com/office/drawing/2014/main" id="{3DD6F76B-7BE2-B872-E3AC-6776A4FD3F51}"/>
+              </a:ext>
+            </a:extLst>
+          </p:cNvPr>
+          <p:cNvSpPr txBox="1"/>
+          <p:nvPr/>
+        </p:nvSpPr>
+        <p:spPr>
+          <a:xfrm>
+            <a:off x="1199536" y="1068934"/>
+            <a:ext cx="7413522" cy="5601533"/>
+          </a:xfrm>
+          <a:prstGeom prst="rect">
+            <a:avLst/>
+          </a:prstGeom>
+          <a:noFill/>
+        </p:spPr>
+        <p:txBody>
+          <a:bodyPr wrap="square" rtlCol="0">
+            <a:spAutoFit/>
+          </a:bodyPr>
+          <a:lstStyle/>
+          <a:p>
+            <a:r>
+              <a:rPr lang="en-US" sz="4000" b="1" dirty="0"/>
+              <a:t>CUPRINS</a:t>
+            </a:r>
+          </a:p>
+          <a:p>
+            <a:endParaRPr lang="en-US" dirty="0"/>
+          </a:p>
+          <a:p>
+            <a:pPr marL="342900" indent="-342900">
+              <a:buAutoNum type="arabicPeriod"/>
+            </a:pPr>
+            <a:r>
+              <a:rPr lang="en-US" sz="2400" dirty="0" err="1"/>
+              <a:t>Scurta</a:t>
+            </a:r>
+            <a:r>
+              <a:rPr lang="en-US" sz="2400" dirty="0"/>
+              <a:t> </a:t>
+            </a:r>
+            <a:r>
+              <a:rPr lang="en-US" sz="2400" dirty="0" err="1"/>
+              <a:t>descriere</a:t>
+            </a:r>
+            <a:endParaRPr lang="en-US" sz="2400" dirty="0"/>
+          </a:p>
+          <a:p>
+            <a:pPr marL="342900" indent="-342900">
+              <a:buAutoNum type="arabicPeriod"/>
+            </a:pPr>
+            <a:r>
+              <a:rPr lang="en-US" sz="2400" dirty="0" err="1"/>
+              <a:t>Detalii</a:t>
+            </a:r>
+            <a:r>
+              <a:rPr lang="en-US" sz="2400" dirty="0"/>
+              <a:t> </a:t>
+            </a:r>
+            <a:r>
+              <a:rPr lang="en-US" sz="2400" dirty="0" err="1"/>
+              <a:t>despre</a:t>
+            </a:r>
+            <a:r>
+              <a:rPr lang="en-US" sz="2400" dirty="0"/>
+              <a:t> environment</a:t>
+            </a:r>
+          </a:p>
+          <a:p>
+            <a:pPr marL="342900" indent="-342900">
+              <a:buAutoNum type="arabicPeriod"/>
+            </a:pPr>
+            <a:r>
+              <a:rPr lang="en-US" sz="2400" dirty="0"/>
+              <a:t>Module </a:t>
+            </a:r>
+            <a:r>
+              <a:rPr lang="en-US" sz="2400" dirty="0" err="1"/>
+              <a:t>folosite</a:t>
+            </a:r>
+            <a:endParaRPr lang="en-US" sz="2400" dirty="0"/>
+          </a:p>
+          <a:p>
+            <a:pPr marL="342900" indent="-342900">
+              <a:buAutoNum type="arabicPeriod"/>
+            </a:pPr>
+            <a:r>
+              <a:rPr lang="en-US" sz="2400" dirty="0" err="1"/>
+              <a:t>Generarea</a:t>
+            </a:r>
+            <a:r>
+              <a:rPr lang="en-US" sz="2400" dirty="0"/>
+              <a:t> </a:t>
+            </a:r>
+            <a:r>
+              <a:rPr lang="en-US" sz="2400" dirty="0" err="1"/>
+              <a:t>datelor</a:t>
+            </a:r>
+            <a:r>
+              <a:rPr lang="en-US" sz="2400" dirty="0"/>
+              <a:t> - </a:t>
+            </a:r>
+            <a:r>
+              <a:rPr lang="en-US" sz="2400" dirty="0" err="1"/>
+              <a:t>Perioada</a:t>
+            </a:r>
+            <a:r>
+              <a:rPr lang="en-US" sz="2400" dirty="0"/>
+              <a:t> 2012-2025</a:t>
+            </a:r>
+          </a:p>
+          <a:p>
+            <a:pPr marL="342900" indent="-342900">
+              <a:buAutoNum type="arabicPeriod"/>
+            </a:pPr>
+            <a:r>
+              <a:rPr lang="en-US" sz="2400" dirty="0" err="1"/>
+              <a:t>Generarea</a:t>
+            </a:r>
+            <a:r>
+              <a:rPr lang="en-US" sz="2400" dirty="0"/>
+              <a:t> </a:t>
+            </a:r>
+            <a:r>
+              <a:rPr lang="en-US" sz="2400" dirty="0" err="1"/>
+              <a:t>datelor</a:t>
+            </a:r>
+            <a:r>
+              <a:rPr lang="en-US" sz="2400" dirty="0"/>
+              <a:t> - </a:t>
+            </a:r>
+            <a:r>
+              <a:rPr lang="en-US" sz="2400" dirty="0" err="1"/>
+              <a:t>Perioada</a:t>
+            </a:r>
+            <a:r>
+              <a:rPr lang="en-US" sz="2400" dirty="0"/>
+              <a:t> 1900-2011</a:t>
+            </a:r>
+          </a:p>
+          <a:p>
+            <a:pPr marL="342900" indent="-342900">
+              <a:buAutoNum type="arabicPeriod"/>
+            </a:pPr>
+            <a:r>
+              <a:rPr lang="en-US" sz="2400" dirty="0" err="1"/>
+              <a:t>Intervalul</a:t>
+            </a:r>
+            <a:r>
+              <a:rPr lang="en-US" sz="2400" dirty="0"/>
+              <a:t> 1900-2025</a:t>
+            </a:r>
+          </a:p>
+          <a:p>
+            <a:pPr marL="342900" indent="-342900">
+              <a:buFontTx/>
+              <a:buAutoNum type="arabicPeriod"/>
+            </a:pPr>
+            <a:r>
+              <a:rPr lang="it-IT" sz="2400" dirty="0"/>
+              <a:t>Modelarea si prognoza preturilor – abordare hibrida</a:t>
+            </a:r>
+          </a:p>
+          <a:p>
+            <a:pPr marL="342900" indent="-342900">
+              <a:buFontTx/>
+              <a:buAutoNum type="arabicPeriod"/>
+            </a:pPr>
+            <a:r>
+              <a:rPr lang="it-IT" sz="2400" dirty="0"/>
+              <a:t>Modul de vizualizare al datelor</a:t>
+            </a:r>
+          </a:p>
+          <a:p>
+            <a:pPr marL="342900" indent="-342900">
+              <a:buFontTx/>
+              <a:buAutoNum type="arabicPeriod"/>
+            </a:pPr>
+            <a:r>
+              <a:rPr lang="it-IT" sz="2400" dirty="0"/>
+              <a:t>Probleme intalnite si solutii</a:t>
+            </a:r>
+            <a:endParaRPr lang="ro-RO" sz="2400" dirty="0"/>
+          </a:p>
+          <a:p>
+            <a:pPr marL="342900" indent="-342900">
+              <a:buAutoNum type="arabicPeriod"/>
+            </a:pPr>
+            <a:r>
+              <a:rPr lang="en-US" sz="2400" dirty="0" err="1"/>
+              <a:t>Planuri</a:t>
+            </a:r>
+            <a:r>
+              <a:rPr lang="en-US" sz="2400" dirty="0"/>
+              <a:t> de </a:t>
+            </a:r>
+            <a:r>
+              <a:rPr lang="en-US" sz="2400" dirty="0" err="1"/>
+              <a:t>viitor</a:t>
+            </a:r>
+            <a:endParaRPr lang="it-IT" sz="2400" dirty="0"/>
+          </a:p>
+          <a:p>
+            <a:pPr marL="342900" indent="-342900">
+              <a:buFontTx/>
+              <a:buAutoNum type="arabicPeriod"/>
+            </a:pPr>
+            <a:r>
+              <a:rPr lang="it-IT" sz="2400" dirty="0"/>
+              <a:t>Webografie</a:t>
+            </a:r>
+          </a:p>
+          <a:p>
+            <a:pPr marL="342900" indent="-342900">
+              <a:buAutoNum type="arabicPeriod"/>
+            </a:pPr>
+            <a:endParaRPr lang="en-US" dirty="0"/>
+          </a:p>
+          <a:p>
+            <a:pPr marL="342900" indent="-342900">
+              <a:buAutoNum type="arabicPeriod"/>
+            </a:pPr>
+            <a:endParaRPr lang="ro-RO" dirty="0"/>
+          </a:p>
+        </p:txBody>
+      </p:sp>
+    </p:spTree>
+    <p:extLst>
+      <p:ext uri="{BB962C8B-B14F-4D97-AF65-F5344CB8AC3E}">
+        <p14:creationId xmlns:p14="http://schemas.microsoft.com/office/powerpoint/2010/main" val="2332330915"/>
+      </p:ext>
+    </p:extLst>
+  </p:cSld>
+  <p:clrMapOvr>
+    <a:masterClrMapping/>
+  </p:clrMapOvr>
+</p:sld>
+</file>
+
+<file path=ppt/slides/slide3.xml><?xml version="1.0" encoding="utf-8"?>
 <p:sld xmlns:a="http://schemas.openxmlformats.org/drawingml/2006/main" xmlns:r="http://schemas.openxmlformats.org/officeDocument/2006/relationships" xmlns:p="http://schemas.openxmlformats.org/presentationml/2006/main">
   <p:cSld>
     <p:bg>
@@ -3881,8 +6004,8 @@
         </p:nvSpPr>
         <p:spPr>
           <a:xfrm>
-            <a:off x="516590" y="424964"/>
-            <a:ext cx="3404616" cy="461665"/>
+            <a:off x="516589" y="424964"/>
+            <a:ext cx="4311049" cy="461665"/>
           </a:xfrm>
           <a:prstGeom prst="rect">
             <a:avLst/>
@@ -3895,6 +6018,17 @@
           </a:bodyPr>
           <a:lstStyle/>
           <a:p>
+            <a:r>
+              <a:rPr lang="en-US" sz="2400" i="1" dirty="0">
+                <a:solidFill>
+                  <a:schemeClr val="bg1">
+                    <a:lumMod val="95000"/>
+                  </a:schemeClr>
+                </a:solidFill>
+                <a:latin typeface="Arial Rounded MT Bold" panose="020F0704030504030204" pitchFamily="34" charset="0"/>
+              </a:rPr>
+              <a:t>1.  </a:t>
+            </a:r>
             <a:r>
               <a:rPr lang="ro-RO" sz="2400" i="1" dirty="0">
                 <a:solidFill>
@@ -4623,7 +6757,1327 @@
 </p:sld>
 </file>
 
-<file path=ppt/slides/slide3.xml><?xml version="1.0" encoding="utf-8"?>
+<file path=ppt/slides/slide4.xml><?xml version="1.0" encoding="utf-8"?>
+<p:sld xmlns:a="http://schemas.openxmlformats.org/drawingml/2006/main" xmlns:r="http://schemas.openxmlformats.org/officeDocument/2006/relationships" xmlns:p="http://schemas.openxmlformats.org/presentationml/2006/main">
+  <p:cSld>
+    <p:bg>
+      <p:bgPr>
+        <a:blipFill dpi="0" rotWithShape="1">
+          <a:blip r:embed="rId2">
+            <a:lum/>
+          </a:blip>
+          <a:srcRect/>
+          <a:stretch>
+            <a:fillRect l="-9000" r="-9000"/>
+          </a:stretch>
+        </a:blipFill>
+        <a:effectLst/>
+      </p:bgPr>
+    </p:bg>
+    <p:spTree>
+      <p:nvGrpSpPr>
+        <p:cNvPr id="1" name="">
+          <a:extLst>
+            <a:ext uri="{FF2B5EF4-FFF2-40B4-BE49-F238E27FC236}">
+              <a16:creationId xmlns:a16="http://schemas.microsoft.com/office/drawing/2014/main" id="{45BCF1B3-E86D-27BF-3C72-9F311B5556C6}"/>
+            </a:ext>
+          </a:extLst>
+        </p:cNvPr>
+        <p:cNvGrpSpPr/>
+        <p:nvPr/>
+      </p:nvGrpSpPr>
+      <p:grpSpPr>
+        <a:xfrm>
+          <a:off x="0" y="0"/>
+          <a:ext cx="0" cy="0"/>
+          <a:chOff x="0" y="0"/>
+          <a:chExt cx="0" cy="0"/>
+        </a:xfrm>
+      </p:grpSpPr>
+      <p:sp>
+        <p:nvSpPr>
+          <p:cNvPr id="5" name="TextBox 4">
+            <a:extLst>
+              <a:ext uri="{FF2B5EF4-FFF2-40B4-BE49-F238E27FC236}">
+                <a16:creationId xmlns:a16="http://schemas.microsoft.com/office/drawing/2014/main" id="{04BC0B15-ECE2-84CB-BFCE-CB48E05FD45A}"/>
+              </a:ext>
+            </a:extLst>
+          </p:cNvPr>
+          <p:cNvSpPr txBox="1"/>
+          <p:nvPr/>
+        </p:nvSpPr>
+        <p:spPr>
+          <a:xfrm>
+            <a:off x="0" y="432222"/>
+            <a:ext cx="12192000" cy="5755422"/>
+          </a:xfrm>
+          <a:prstGeom prst="rect">
+            <a:avLst/>
+          </a:prstGeom>
+          <a:noFill/>
+        </p:spPr>
+        <p:txBody>
+          <a:bodyPr wrap="square">
+            <a:spAutoFit/>
+          </a:bodyPr>
+          <a:lstStyle/>
+          <a:p>
+            <a:r>
+              <a:rPr lang="en-US" sz="2400" b="1" dirty="0">
+                <a:solidFill>
+                  <a:schemeClr val="bg1">
+                    <a:lumMod val="95000"/>
+                  </a:schemeClr>
+                </a:solidFill>
+              </a:rPr>
+              <a:t>	</a:t>
+            </a:r>
+            <a:r>
+              <a:rPr lang="en-US" sz="3200" b="1" dirty="0">
+                <a:solidFill>
+                  <a:schemeClr val="bg1">
+                    <a:lumMod val="95000"/>
+                  </a:schemeClr>
+                </a:solidFill>
+              </a:rPr>
+              <a:t>2. </a:t>
+            </a:r>
+            <a:r>
+              <a:rPr lang="en-US" sz="3200" b="1" dirty="0" err="1">
+                <a:solidFill>
+                  <a:schemeClr val="bg1">
+                    <a:lumMod val="95000"/>
+                  </a:schemeClr>
+                </a:solidFill>
+              </a:rPr>
+              <a:t>Detalii</a:t>
+            </a:r>
+            <a:r>
+              <a:rPr lang="en-US" sz="3200" b="1" dirty="0">
+                <a:solidFill>
+                  <a:schemeClr val="bg1">
+                    <a:lumMod val="95000"/>
+                  </a:schemeClr>
+                </a:solidFill>
+              </a:rPr>
+              <a:t> </a:t>
+            </a:r>
+            <a:r>
+              <a:rPr lang="en-US" sz="3200" b="1" dirty="0" err="1">
+                <a:solidFill>
+                  <a:schemeClr val="bg1">
+                    <a:lumMod val="95000"/>
+                  </a:schemeClr>
+                </a:solidFill>
+              </a:rPr>
+              <a:t>despre</a:t>
+            </a:r>
+            <a:r>
+              <a:rPr lang="en-US" sz="3200" b="1" dirty="0">
+                <a:solidFill>
+                  <a:schemeClr val="bg1">
+                    <a:lumMod val="95000"/>
+                  </a:schemeClr>
+                </a:solidFill>
+              </a:rPr>
+              <a:t> environment:</a:t>
+            </a:r>
+          </a:p>
+          <a:p>
+            <a:r>
+              <a:rPr lang="en-US" sz="2400" b="1" dirty="0">
+                <a:solidFill>
+                  <a:schemeClr val="bg1">
+                    <a:lumMod val="95000"/>
+                  </a:schemeClr>
+                </a:solidFill>
+              </a:rPr>
+              <a:t>    </a:t>
+            </a:r>
+          </a:p>
+          <a:p>
+            <a:r>
+              <a:rPr lang="en-US" sz="2400" b="1" dirty="0">
+                <a:solidFill>
+                  <a:schemeClr val="bg1">
+                    <a:lumMod val="95000"/>
+                  </a:schemeClr>
+                </a:solidFill>
+              </a:rPr>
+              <a:t>   		</a:t>
+            </a:r>
+            <a:r>
+              <a:rPr lang="en-US" sz="2400" b="1" i="1" dirty="0" err="1">
+                <a:solidFill>
+                  <a:schemeClr val="bg1">
+                    <a:lumMod val="95000"/>
+                  </a:schemeClr>
+                </a:solidFill>
+              </a:rPr>
+              <a:t>Editorul</a:t>
+            </a:r>
+            <a:r>
+              <a:rPr lang="en-US" sz="2400" b="1" i="1" dirty="0">
+                <a:solidFill>
+                  <a:schemeClr val="bg1">
+                    <a:lumMod val="95000"/>
+                  </a:schemeClr>
+                </a:solidFill>
+              </a:rPr>
+              <a:t> de cod </a:t>
+            </a:r>
+            <a:r>
+              <a:rPr lang="en-US" sz="2400" b="1" i="1" dirty="0" err="1">
+                <a:solidFill>
+                  <a:schemeClr val="bg1">
+                    <a:lumMod val="95000"/>
+                  </a:schemeClr>
+                </a:solidFill>
+              </a:rPr>
+              <a:t>folosit</a:t>
+            </a:r>
+            <a:r>
+              <a:rPr lang="en-US" sz="2400" b="1" i="1" dirty="0">
+                <a:solidFill>
+                  <a:schemeClr val="bg1">
+                    <a:lumMod val="95000"/>
+                  </a:schemeClr>
+                </a:solidFill>
+              </a:rPr>
+              <a:t> </a:t>
+            </a:r>
+            <a:r>
+              <a:rPr lang="en-US" sz="2400" b="1" dirty="0">
+                <a:solidFill>
+                  <a:schemeClr val="bg1">
+                    <a:lumMod val="95000"/>
+                  </a:schemeClr>
+                </a:solidFill>
+              </a:rPr>
+              <a:t>: </a:t>
+            </a:r>
+            <a:r>
+              <a:rPr lang="en-US" sz="2400" dirty="0" err="1">
+                <a:solidFill>
+                  <a:schemeClr val="bg1">
+                    <a:lumMod val="95000"/>
+                  </a:schemeClr>
+                </a:solidFill>
+              </a:rPr>
+              <a:t>PYCharm</a:t>
+            </a:r>
+            <a:endParaRPr lang="en-US" sz="2400" dirty="0">
+              <a:solidFill>
+                <a:schemeClr val="bg1">
+                  <a:lumMod val="95000"/>
+                </a:schemeClr>
+              </a:solidFill>
+            </a:endParaRPr>
+          </a:p>
+          <a:p>
+            <a:r>
+              <a:rPr lang="en-US" sz="2400" b="1" dirty="0">
+                <a:solidFill>
+                  <a:schemeClr val="bg1">
+                    <a:lumMod val="95000"/>
+                  </a:schemeClr>
+                </a:solidFill>
+              </a:rPr>
+              <a:t>                           </a:t>
+            </a:r>
+            <a:r>
+              <a:rPr lang="en-US" sz="2400" b="1" i="1" dirty="0" err="1">
+                <a:solidFill>
+                  <a:schemeClr val="bg1">
+                    <a:lumMod val="95000"/>
+                  </a:schemeClr>
+                </a:solidFill>
+              </a:rPr>
+              <a:t>Versiune</a:t>
+            </a:r>
+            <a:r>
+              <a:rPr lang="en-US" sz="2400" b="1" i="1" dirty="0">
+                <a:solidFill>
+                  <a:schemeClr val="bg1">
+                    <a:lumMod val="95000"/>
+                  </a:schemeClr>
+                </a:solidFill>
+              </a:rPr>
+              <a:t> de Python</a:t>
+            </a:r>
+            <a:r>
+              <a:rPr lang="en-US" sz="2400" b="1" dirty="0">
+                <a:solidFill>
+                  <a:schemeClr val="bg1">
+                    <a:lumMod val="95000"/>
+                  </a:schemeClr>
+                </a:solidFill>
+              </a:rPr>
+              <a:t>: </a:t>
+            </a:r>
+            <a:r>
+              <a:rPr lang="en-US" sz="2400" dirty="0">
+                <a:solidFill>
+                  <a:schemeClr val="bg1">
+                    <a:lumMod val="95000"/>
+                  </a:schemeClr>
+                </a:solidFill>
+              </a:rPr>
+              <a:t>3.10.4</a:t>
+            </a:r>
+          </a:p>
+          <a:p>
+            <a:endParaRPr lang="en-US" sz="2400" b="1" dirty="0">
+              <a:solidFill>
+                <a:schemeClr val="bg1">
+                  <a:lumMod val="95000"/>
+                </a:schemeClr>
+              </a:solidFill>
+            </a:endParaRPr>
+          </a:p>
+          <a:p>
+            <a:endParaRPr lang="en-US" sz="2400" b="1" dirty="0">
+              <a:solidFill>
+                <a:schemeClr val="bg1">
+                  <a:lumMod val="95000"/>
+                </a:schemeClr>
+              </a:solidFill>
+            </a:endParaRPr>
+          </a:p>
+          <a:p>
+            <a:r>
+              <a:rPr lang="en-US" sz="2400" b="1" dirty="0">
+                <a:solidFill>
+                  <a:schemeClr val="bg1">
+                    <a:lumMod val="95000"/>
+                  </a:schemeClr>
+                </a:solidFill>
+              </a:rPr>
+              <a:t>		</a:t>
+            </a:r>
+            <a:r>
+              <a:rPr lang="en-US" sz="2400" b="1" i="1" dirty="0">
+                <a:solidFill>
+                  <a:schemeClr val="bg1">
+                    <a:lumMod val="95000"/>
+                  </a:schemeClr>
+                </a:solidFill>
+              </a:rPr>
+              <a:t>Cele </a:t>
+            </a:r>
+            <a:r>
+              <a:rPr lang="en-US" sz="2400" b="1" i="1" dirty="0" err="1">
+                <a:solidFill>
+                  <a:schemeClr val="bg1">
+                    <a:lumMod val="95000"/>
+                  </a:schemeClr>
+                </a:solidFill>
+              </a:rPr>
+              <a:t>mai</a:t>
+            </a:r>
+            <a:r>
+              <a:rPr lang="en-US" sz="2400" b="1" i="1" dirty="0">
+                <a:solidFill>
+                  <a:schemeClr val="bg1">
+                    <a:lumMod val="95000"/>
+                  </a:schemeClr>
+                </a:solidFill>
+              </a:rPr>
+              <a:t> </a:t>
+            </a:r>
+            <a:r>
+              <a:rPr lang="en-US" sz="2400" b="1" i="1" dirty="0" err="1">
+                <a:solidFill>
+                  <a:schemeClr val="bg1">
+                    <a:lumMod val="95000"/>
+                  </a:schemeClr>
+                </a:solidFill>
+              </a:rPr>
+              <a:t>folosite</a:t>
+            </a:r>
+            <a:r>
+              <a:rPr lang="en-US" sz="2400" b="1" i="1" dirty="0">
+                <a:solidFill>
+                  <a:schemeClr val="bg1">
+                    <a:lumMod val="95000"/>
+                  </a:schemeClr>
+                </a:solidFill>
+              </a:rPr>
+              <a:t> module</a:t>
+            </a:r>
+            <a:r>
+              <a:rPr lang="en-US" sz="2400" b="1" dirty="0">
+                <a:solidFill>
+                  <a:schemeClr val="bg1">
+                    <a:lumMod val="95000"/>
+                  </a:schemeClr>
+                </a:solidFill>
+              </a:rPr>
+              <a:t>:</a:t>
+            </a:r>
+          </a:p>
+          <a:p>
+            <a:endParaRPr lang="en-US" sz="2400" b="1" dirty="0">
+              <a:solidFill>
+                <a:schemeClr val="bg1">
+                  <a:lumMod val="95000"/>
+                </a:schemeClr>
+              </a:solidFill>
+            </a:endParaRPr>
+          </a:p>
+          <a:p>
+            <a:r>
+              <a:rPr lang="en-US" sz="2400" b="1" dirty="0">
+                <a:solidFill>
+                  <a:schemeClr val="bg1">
+                    <a:lumMod val="95000"/>
+                  </a:schemeClr>
+                </a:solidFill>
+              </a:rPr>
+              <a:t>		</a:t>
+            </a:r>
+            <a:r>
+              <a:rPr lang="en-US" sz="2400" dirty="0">
+                <a:solidFill>
+                  <a:schemeClr val="bg1">
+                    <a:lumMod val="95000"/>
+                  </a:schemeClr>
+                </a:solidFill>
+              </a:rPr>
+              <a:t>pandas </a:t>
+            </a:r>
+          </a:p>
+          <a:p>
+            <a:r>
+              <a:rPr lang="en-US" sz="2400" dirty="0">
+                <a:solidFill>
+                  <a:schemeClr val="bg1">
+                    <a:lumMod val="95000"/>
+                  </a:schemeClr>
+                </a:solidFill>
+              </a:rPr>
+              <a:t>		matplotlib</a:t>
+            </a:r>
+          </a:p>
+          <a:p>
+            <a:r>
+              <a:rPr lang="en-US" sz="2400" dirty="0">
+                <a:solidFill>
+                  <a:schemeClr val="bg1">
+                    <a:lumMod val="95000"/>
+                  </a:schemeClr>
+                </a:solidFill>
+              </a:rPr>
+              <a:t>		scikit-learn</a:t>
+            </a:r>
+          </a:p>
+          <a:p>
+            <a:r>
+              <a:rPr lang="en-US" sz="2400" dirty="0">
+                <a:solidFill>
+                  <a:schemeClr val="bg1">
+                    <a:lumMod val="95000"/>
+                  </a:schemeClr>
+                </a:solidFill>
+              </a:rPr>
+              <a:t>		</a:t>
+            </a:r>
+            <a:r>
+              <a:rPr lang="en-US" sz="2400" dirty="0" err="1">
+                <a:solidFill>
+                  <a:schemeClr val="bg1">
+                    <a:lumMod val="95000"/>
+                  </a:schemeClr>
+                </a:solidFill>
+              </a:rPr>
+              <a:t>beautifulsoup</a:t>
+            </a:r>
+            <a:endParaRPr lang="en-US" sz="2400" dirty="0">
+              <a:solidFill>
+                <a:schemeClr val="bg1">
+                  <a:lumMod val="95000"/>
+                </a:schemeClr>
+              </a:solidFill>
+            </a:endParaRPr>
+          </a:p>
+          <a:p>
+            <a:r>
+              <a:rPr lang="en-US" sz="2400" dirty="0">
+                <a:solidFill>
+                  <a:schemeClr val="bg1">
+                    <a:lumMod val="95000"/>
+                  </a:schemeClr>
+                </a:solidFill>
+              </a:rPr>
+              <a:t>		</a:t>
+            </a:r>
+            <a:r>
+              <a:rPr lang="en-US" sz="2400" dirty="0" err="1">
+                <a:solidFill>
+                  <a:schemeClr val="bg1">
+                    <a:lumMod val="95000"/>
+                  </a:schemeClr>
+                </a:solidFill>
+              </a:rPr>
+              <a:t>streamlit</a:t>
+            </a:r>
+            <a:endParaRPr lang="en-US" sz="2400" dirty="0">
+              <a:solidFill>
+                <a:schemeClr val="bg1">
+                  <a:lumMod val="95000"/>
+                </a:schemeClr>
+              </a:solidFill>
+            </a:endParaRPr>
+          </a:p>
+          <a:p>
+            <a:r>
+              <a:rPr lang="en-US" sz="2400" dirty="0">
+                <a:solidFill>
+                  <a:schemeClr val="bg1">
+                    <a:lumMod val="95000"/>
+                  </a:schemeClr>
+                </a:solidFill>
+              </a:rPr>
+              <a:t>		</a:t>
+            </a:r>
+            <a:r>
+              <a:rPr lang="en-US" sz="2400" dirty="0" err="1">
+                <a:solidFill>
+                  <a:schemeClr val="bg1">
+                    <a:lumMod val="95000"/>
+                  </a:schemeClr>
+                </a:solidFill>
+              </a:rPr>
+              <a:t>scipy</a:t>
+            </a:r>
+            <a:endParaRPr lang="en-US" sz="2400" dirty="0">
+              <a:solidFill>
+                <a:schemeClr val="bg1">
+                  <a:lumMod val="95000"/>
+                </a:schemeClr>
+              </a:solidFill>
+            </a:endParaRPr>
+          </a:p>
+          <a:p>
+            <a:r>
+              <a:rPr lang="en-US" sz="2400" dirty="0">
+                <a:solidFill>
+                  <a:schemeClr val="bg1">
+                    <a:lumMod val="95000"/>
+                  </a:schemeClr>
+                </a:solidFill>
+              </a:rPr>
+              <a:t>	</a:t>
+            </a:r>
+            <a:endParaRPr lang="en-US" sz="1600" dirty="0">
+              <a:solidFill>
+                <a:schemeClr val="bg1">
+                  <a:lumMod val="95000"/>
+                </a:schemeClr>
+              </a:solidFill>
+            </a:endParaRPr>
+          </a:p>
+        </p:txBody>
+      </p:sp>
+    </p:spTree>
+    <p:extLst>
+      <p:ext uri="{BB962C8B-B14F-4D97-AF65-F5344CB8AC3E}">
+        <p14:creationId xmlns:p14="http://schemas.microsoft.com/office/powerpoint/2010/main" val="2834311557"/>
+      </p:ext>
+    </p:extLst>
+  </p:cSld>
+  <p:clrMapOvr>
+    <a:masterClrMapping/>
+  </p:clrMapOvr>
+</p:sld>
+</file>
+
+<file path=ppt/slides/slide5.xml><?xml version="1.0" encoding="utf-8"?>
+<p:sld xmlns:a="http://schemas.openxmlformats.org/drawingml/2006/main" xmlns:r="http://schemas.openxmlformats.org/officeDocument/2006/relationships" xmlns:p="http://schemas.openxmlformats.org/presentationml/2006/main">
+  <p:cSld>
+    <p:bg>
+      <p:bgPr>
+        <a:blipFill dpi="0" rotWithShape="1">
+          <a:blip r:embed="rId2">
+            <a:lum/>
+          </a:blip>
+          <a:srcRect/>
+          <a:stretch>
+            <a:fillRect l="-9000" r="-9000"/>
+          </a:stretch>
+        </a:blipFill>
+        <a:effectLst/>
+      </p:bgPr>
+    </p:bg>
+    <p:spTree>
+      <p:nvGrpSpPr>
+        <p:cNvPr id="1" name="">
+          <a:extLst>
+            <a:ext uri="{FF2B5EF4-FFF2-40B4-BE49-F238E27FC236}">
+              <a16:creationId xmlns:a16="http://schemas.microsoft.com/office/drawing/2014/main" id="{F571D5D4-C5F0-EAD5-367A-43942448C7AF}"/>
+            </a:ext>
+          </a:extLst>
+        </p:cNvPr>
+        <p:cNvGrpSpPr/>
+        <p:nvPr/>
+      </p:nvGrpSpPr>
+      <p:grpSpPr>
+        <a:xfrm>
+          <a:off x="0" y="0"/>
+          <a:ext cx="0" cy="0"/>
+          <a:chOff x="0" y="0"/>
+          <a:chExt cx="0" cy="0"/>
+        </a:xfrm>
+      </p:grpSpPr>
+      <p:sp>
+        <p:nvSpPr>
+          <p:cNvPr id="5" name="TextBox 4">
+            <a:extLst>
+              <a:ext uri="{FF2B5EF4-FFF2-40B4-BE49-F238E27FC236}">
+                <a16:creationId xmlns:a16="http://schemas.microsoft.com/office/drawing/2014/main" id="{15765321-9F2B-5774-A795-7395C7990D79}"/>
+              </a:ext>
+            </a:extLst>
+          </p:cNvPr>
+          <p:cNvSpPr txBox="1"/>
+          <p:nvPr/>
+        </p:nvSpPr>
+        <p:spPr>
+          <a:xfrm>
+            <a:off x="0" y="432222"/>
+            <a:ext cx="12192000" cy="6247864"/>
+          </a:xfrm>
+          <a:prstGeom prst="rect">
+            <a:avLst/>
+          </a:prstGeom>
+          <a:noFill/>
+        </p:spPr>
+        <p:txBody>
+          <a:bodyPr wrap="square">
+            <a:spAutoFit/>
+          </a:bodyPr>
+          <a:lstStyle/>
+          <a:p>
+            <a:pPr algn="ctr"/>
+            <a:r>
+              <a:rPr lang="en-US" sz="2400" b="1" dirty="0">
+                <a:solidFill>
+                  <a:schemeClr val="bg1">
+                    <a:lumMod val="95000"/>
+                  </a:schemeClr>
+                </a:solidFill>
+              </a:rPr>
+              <a:t>3. Module </a:t>
+            </a:r>
+            <a:r>
+              <a:rPr lang="en-US" sz="2400" b="1" dirty="0" err="1">
+                <a:solidFill>
+                  <a:schemeClr val="bg1">
+                    <a:lumMod val="95000"/>
+                  </a:schemeClr>
+                </a:solidFill>
+              </a:rPr>
+              <a:t>folosite</a:t>
+            </a:r>
+            <a:r>
+              <a:rPr lang="en-US" sz="2400" b="1" dirty="0">
+                <a:solidFill>
+                  <a:schemeClr val="bg1">
+                    <a:lumMod val="95000"/>
+                  </a:schemeClr>
+                </a:solidFill>
+              </a:rPr>
+              <a:t>:</a:t>
+            </a:r>
+          </a:p>
+          <a:p>
+            <a:r>
+              <a:rPr lang="en-US" sz="2400" b="1" dirty="0">
+                <a:solidFill>
+                  <a:schemeClr val="bg1">
+                    <a:lumMod val="95000"/>
+                  </a:schemeClr>
+                </a:solidFill>
+              </a:rPr>
+              <a:t>      </a:t>
+            </a:r>
+            <a:r>
+              <a:rPr lang="en-US" sz="1600" dirty="0">
+                <a:solidFill>
+                  <a:schemeClr val="bg1">
+                    <a:lumMod val="95000"/>
+                  </a:schemeClr>
+                </a:solidFill>
+              </a:rPr>
+              <a:t>p</a:t>
+            </a:r>
+            <a:r>
+              <a:rPr lang="ro-RO" sz="1600" dirty="0">
+                <a:solidFill>
+                  <a:schemeClr val="bg1">
+                    <a:lumMod val="95000"/>
+                  </a:schemeClr>
+                </a:solidFill>
+              </a:rPr>
+              <a:t>andas</a:t>
+            </a:r>
+            <a:endParaRPr lang="en-US" sz="1600" dirty="0">
+              <a:solidFill>
+                <a:schemeClr val="bg1">
+                  <a:lumMod val="95000"/>
+                </a:schemeClr>
+              </a:solidFill>
+            </a:endParaRPr>
+          </a:p>
+          <a:p>
+            <a:r>
+              <a:rPr lang="en-US" sz="1600" dirty="0">
+                <a:solidFill>
+                  <a:schemeClr val="bg1">
+                    <a:lumMod val="95000"/>
+                  </a:schemeClr>
+                </a:solidFill>
+              </a:rPr>
+              <a:t>	m</a:t>
+            </a:r>
+            <a:r>
+              <a:rPr lang="ro-RO" sz="1600" dirty="0">
+                <a:solidFill>
+                  <a:schemeClr val="bg1">
+                    <a:lumMod val="95000"/>
+                  </a:schemeClr>
+                </a:solidFill>
+              </a:rPr>
+              <a:t>atplotlib</a:t>
+            </a:r>
+            <a:endParaRPr lang="en-US" sz="1600" dirty="0">
+              <a:solidFill>
+                <a:schemeClr val="bg1">
+                  <a:lumMod val="95000"/>
+                </a:schemeClr>
+              </a:solidFill>
+            </a:endParaRPr>
+          </a:p>
+          <a:p>
+            <a:pPr lvl="4"/>
+            <a:r>
+              <a:rPr lang="en-US" sz="1600" dirty="0">
+                <a:solidFill>
+                  <a:schemeClr val="bg1">
+                    <a:lumMod val="95000"/>
+                  </a:schemeClr>
+                </a:solidFill>
+              </a:rPr>
+              <a:t>s</a:t>
+            </a:r>
+            <a:r>
+              <a:rPr lang="ro-RO" sz="1600" dirty="0">
+                <a:solidFill>
+                  <a:schemeClr val="bg1">
+                    <a:lumMod val="95000"/>
+                  </a:schemeClr>
+                </a:solidFill>
+              </a:rPr>
+              <a:t>eaborn</a:t>
+            </a:r>
+            <a:endParaRPr lang="en-US" sz="1600" dirty="0">
+              <a:solidFill>
+                <a:schemeClr val="bg1">
+                  <a:lumMod val="95000"/>
+                </a:schemeClr>
+              </a:solidFill>
+            </a:endParaRPr>
+          </a:p>
+          <a:p>
+            <a:pPr lvl="4"/>
+            <a:r>
+              <a:rPr lang="en-US" sz="1600" dirty="0">
+                <a:solidFill>
+                  <a:schemeClr val="bg1">
+                    <a:lumMod val="95000"/>
+                  </a:schemeClr>
+                </a:solidFill>
+              </a:rPr>
+              <a:t>	</a:t>
+            </a:r>
+            <a:r>
+              <a:rPr lang="ro-RO" sz="1600" dirty="0">
+                <a:solidFill>
+                  <a:schemeClr val="bg1">
+                    <a:lumMod val="95000"/>
+                  </a:schemeClr>
+                </a:solidFill>
+              </a:rPr>
+              <a:t>scikit-learn</a:t>
+            </a:r>
+            <a:endParaRPr lang="en-US" sz="1600" dirty="0">
+              <a:solidFill>
+                <a:schemeClr val="bg1">
+                  <a:lumMod val="95000"/>
+                </a:schemeClr>
+              </a:solidFill>
+            </a:endParaRPr>
+          </a:p>
+          <a:p>
+            <a:pPr lvl="4"/>
+            <a:r>
+              <a:rPr lang="en-US" sz="1600" dirty="0">
+                <a:solidFill>
+                  <a:schemeClr val="bg1">
+                    <a:lumMod val="95000"/>
+                  </a:schemeClr>
+                </a:solidFill>
+              </a:rPr>
+              <a:t>		x</a:t>
+            </a:r>
+            <a:r>
+              <a:rPr lang="ro-RO" sz="1600" dirty="0">
+                <a:solidFill>
+                  <a:schemeClr val="bg1">
+                    <a:lumMod val="95000"/>
+                  </a:schemeClr>
+                </a:solidFill>
+              </a:rPr>
+              <a:t>gboost</a:t>
+            </a:r>
+            <a:endParaRPr lang="en-US" sz="1600" dirty="0">
+              <a:solidFill>
+                <a:schemeClr val="bg1">
+                  <a:lumMod val="95000"/>
+                </a:schemeClr>
+              </a:solidFill>
+            </a:endParaRPr>
+          </a:p>
+          <a:p>
+            <a:pPr lvl="4"/>
+            <a:r>
+              <a:rPr lang="en-US" sz="1600" dirty="0">
+                <a:solidFill>
+                  <a:schemeClr val="bg1">
+                    <a:lumMod val="95000"/>
+                  </a:schemeClr>
+                </a:solidFill>
+              </a:rPr>
+              <a:t>			l</a:t>
+            </a:r>
+            <a:r>
+              <a:rPr lang="ro-RO" sz="1600" dirty="0">
+                <a:solidFill>
+                  <a:schemeClr val="bg1">
+                    <a:lumMod val="95000"/>
+                  </a:schemeClr>
+                </a:solidFill>
+              </a:rPr>
+              <a:t>ightgbm</a:t>
+            </a:r>
+            <a:endParaRPr lang="en-US" sz="1600" dirty="0">
+              <a:solidFill>
+                <a:schemeClr val="bg1">
+                  <a:lumMod val="95000"/>
+                </a:schemeClr>
+              </a:solidFill>
+            </a:endParaRPr>
+          </a:p>
+          <a:p>
+            <a:pPr lvl="4"/>
+            <a:r>
+              <a:rPr lang="en-US" sz="1600" dirty="0">
+                <a:solidFill>
+                  <a:schemeClr val="bg1">
+                    <a:lumMod val="95000"/>
+                  </a:schemeClr>
+                </a:solidFill>
+              </a:rPr>
+              <a:t>				</a:t>
+            </a:r>
+            <a:r>
+              <a:rPr lang="en-US" sz="1600" dirty="0" err="1">
+                <a:solidFill>
+                  <a:schemeClr val="bg1">
+                    <a:lumMod val="95000"/>
+                  </a:schemeClr>
+                </a:solidFill>
+              </a:rPr>
+              <a:t>i</a:t>
+            </a:r>
+            <a:r>
+              <a:rPr lang="ro-RO" sz="1600" dirty="0">
+                <a:solidFill>
+                  <a:schemeClr val="bg1">
+                    <a:lumMod val="95000"/>
+                  </a:schemeClr>
+                </a:solidFill>
+              </a:rPr>
+              <a:t>mbalanced</a:t>
+            </a:r>
+            <a:r>
+              <a:rPr lang="en-US" sz="1600" dirty="0">
+                <a:solidFill>
+                  <a:schemeClr val="bg1">
+                    <a:lumMod val="95000"/>
+                  </a:schemeClr>
+                </a:solidFill>
+              </a:rPr>
+              <a:t>-</a:t>
+            </a:r>
+            <a:r>
+              <a:rPr lang="ro-RO" sz="1600" dirty="0">
+                <a:solidFill>
+                  <a:schemeClr val="bg1">
+                    <a:lumMod val="95000"/>
+                  </a:schemeClr>
+                </a:solidFill>
+              </a:rPr>
+              <a:t>learn</a:t>
+            </a:r>
+            <a:endParaRPr lang="en-US" sz="1600" dirty="0">
+              <a:solidFill>
+                <a:schemeClr val="bg1">
+                  <a:lumMod val="95000"/>
+                </a:schemeClr>
+              </a:solidFill>
+            </a:endParaRPr>
+          </a:p>
+          <a:p>
+            <a:pPr lvl="4"/>
+            <a:r>
+              <a:rPr lang="en-US" sz="1600" dirty="0">
+                <a:solidFill>
+                  <a:schemeClr val="bg1">
+                    <a:lumMod val="95000"/>
+                  </a:schemeClr>
+                </a:solidFill>
+              </a:rPr>
+              <a:t>						</a:t>
+            </a:r>
+            <a:r>
+              <a:rPr lang="ro-RO" sz="1600" dirty="0">
+                <a:solidFill>
+                  <a:schemeClr val="bg1">
+                    <a:lumMod val="95000"/>
+                  </a:schemeClr>
+                </a:solidFill>
+              </a:rPr>
+              <a:t>num</a:t>
+            </a:r>
+            <a:r>
+              <a:rPr lang="en-US" sz="1600" dirty="0" err="1">
+                <a:solidFill>
+                  <a:schemeClr val="bg1">
+                    <a:lumMod val="95000"/>
+                  </a:schemeClr>
+                </a:solidFill>
+              </a:rPr>
+              <a:t>py</a:t>
+            </a:r>
+            <a:endParaRPr lang="en-US" sz="1600" dirty="0">
+              <a:solidFill>
+                <a:schemeClr val="bg1">
+                  <a:lumMod val="95000"/>
+                </a:schemeClr>
+              </a:solidFill>
+            </a:endParaRPr>
+          </a:p>
+          <a:p>
+            <a:pPr lvl="4"/>
+            <a:r>
+              <a:rPr lang="en-US" sz="1600" dirty="0">
+                <a:solidFill>
+                  <a:schemeClr val="bg1">
+                    <a:lumMod val="95000"/>
+                  </a:schemeClr>
+                </a:solidFill>
+              </a:rPr>
+              <a:t>							p</a:t>
+            </a:r>
+            <a:r>
+              <a:rPr lang="ro-RO" sz="1600" dirty="0">
+                <a:solidFill>
+                  <a:schemeClr val="bg1">
+                    <a:lumMod val="95000"/>
+                  </a:schemeClr>
+                </a:solidFill>
+              </a:rPr>
+              <a:t>lotly</a:t>
+            </a:r>
+            <a:endParaRPr lang="en-US" sz="1600" dirty="0">
+              <a:solidFill>
+                <a:schemeClr val="bg1">
+                  <a:lumMod val="95000"/>
+                </a:schemeClr>
+              </a:solidFill>
+            </a:endParaRPr>
+          </a:p>
+          <a:p>
+            <a:pPr lvl="4"/>
+            <a:r>
+              <a:rPr lang="en-US" sz="1600" dirty="0">
+                <a:solidFill>
+                  <a:schemeClr val="bg1">
+                    <a:lumMod val="95000"/>
+                  </a:schemeClr>
+                </a:solidFill>
+              </a:rPr>
+              <a:t>								y</a:t>
+            </a:r>
+            <a:r>
+              <a:rPr lang="ro-RO" sz="1600" dirty="0">
+                <a:solidFill>
+                  <a:schemeClr val="bg1">
+                    <a:lumMod val="95000"/>
+                  </a:schemeClr>
+                </a:solidFill>
+              </a:rPr>
+              <a:t>ellowbrick</a:t>
+            </a:r>
+            <a:endParaRPr lang="en-US" sz="1600" dirty="0">
+              <a:solidFill>
+                <a:schemeClr val="bg1">
+                  <a:lumMod val="95000"/>
+                </a:schemeClr>
+              </a:solidFill>
+            </a:endParaRPr>
+          </a:p>
+          <a:p>
+            <a:pPr lvl="4"/>
+            <a:r>
+              <a:rPr lang="en-US" sz="1600" dirty="0">
+                <a:solidFill>
+                  <a:schemeClr val="bg1">
+                    <a:lumMod val="95000"/>
+                  </a:schemeClr>
+                </a:solidFill>
+              </a:rPr>
+              <a:t>									        t</a:t>
+            </a:r>
+            <a:r>
+              <a:rPr lang="ro-RO" sz="1600" dirty="0">
+                <a:solidFill>
+                  <a:schemeClr val="bg1">
+                    <a:lumMod val="95000"/>
+                  </a:schemeClr>
+                </a:solidFill>
+              </a:rPr>
+              <a:t>qdm</a:t>
+            </a:r>
+            <a:endParaRPr lang="en-US" sz="1600" dirty="0">
+              <a:solidFill>
+                <a:schemeClr val="bg1">
+                  <a:lumMod val="95000"/>
+                </a:schemeClr>
+              </a:solidFill>
+            </a:endParaRPr>
+          </a:p>
+          <a:p>
+            <a:pPr lvl="4"/>
+            <a:r>
+              <a:rPr lang="en-US" sz="1600" dirty="0">
+                <a:solidFill>
+                  <a:schemeClr val="bg1">
+                    <a:lumMod val="95000"/>
+                  </a:schemeClr>
+                </a:solidFill>
+              </a:rPr>
+              <a:t>									</a:t>
+            </a:r>
+          </a:p>
+          <a:p>
+            <a:pPr lvl="4"/>
+            <a:r>
+              <a:rPr lang="en-US" sz="1600" dirty="0">
+                <a:solidFill>
+                  <a:schemeClr val="bg1">
+                    <a:lumMod val="95000"/>
+                  </a:schemeClr>
+                </a:solidFill>
+              </a:rPr>
+              <a:t>								             k</a:t>
+            </a:r>
+            <a:r>
+              <a:rPr lang="ro-RO" sz="1600" dirty="0">
+                <a:solidFill>
+                  <a:schemeClr val="bg1">
+                    <a:lumMod val="95000"/>
+                  </a:schemeClr>
+                </a:solidFill>
+              </a:rPr>
+              <a:t>eras</a:t>
+            </a:r>
+            <a:endParaRPr lang="en-US" sz="1600" dirty="0">
+              <a:solidFill>
+                <a:schemeClr val="bg1">
+                  <a:lumMod val="95000"/>
+                </a:schemeClr>
+              </a:solidFill>
+            </a:endParaRPr>
+          </a:p>
+          <a:p>
+            <a:pPr lvl="4"/>
+            <a:r>
+              <a:rPr lang="en-US" sz="1600" dirty="0">
+                <a:solidFill>
+                  <a:schemeClr val="bg1">
+                    <a:lumMod val="95000"/>
+                  </a:schemeClr>
+                </a:solidFill>
+              </a:rPr>
+              <a:t>							s</a:t>
+            </a:r>
+            <a:r>
+              <a:rPr lang="ro-RO" sz="1600" dirty="0">
+                <a:solidFill>
+                  <a:schemeClr val="bg1">
+                    <a:lumMod val="95000"/>
+                  </a:schemeClr>
+                </a:solidFill>
+              </a:rPr>
+              <a:t>treamlit</a:t>
+            </a:r>
+            <a:endParaRPr lang="en-US" sz="1600" dirty="0">
+              <a:solidFill>
+                <a:schemeClr val="bg1">
+                  <a:lumMod val="95000"/>
+                </a:schemeClr>
+              </a:solidFill>
+            </a:endParaRPr>
+          </a:p>
+          <a:p>
+            <a:pPr lvl="4"/>
+            <a:r>
+              <a:rPr lang="en-US" sz="1600" dirty="0">
+                <a:solidFill>
+                  <a:schemeClr val="bg1">
+                    <a:lumMod val="95000"/>
+                  </a:schemeClr>
+                </a:solidFill>
+              </a:rPr>
+              <a:t>					</a:t>
+            </a:r>
+            <a:r>
+              <a:rPr lang="en-US" sz="1600" dirty="0" err="1">
+                <a:solidFill>
+                  <a:schemeClr val="bg1">
+                    <a:lumMod val="95000"/>
+                  </a:schemeClr>
+                </a:solidFill>
+              </a:rPr>
+              <a:t>beautifulsoup</a:t>
+            </a:r>
+            <a:r>
+              <a:rPr lang="en-US" sz="1600" dirty="0">
+                <a:solidFill>
+                  <a:schemeClr val="bg1">
+                    <a:lumMod val="95000"/>
+                  </a:schemeClr>
+                </a:solidFill>
+              </a:rPr>
+              <a:t>(bs4)</a:t>
+            </a:r>
+          </a:p>
+          <a:p>
+            <a:pPr lvl="4"/>
+            <a:r>
+              <a:rPr lang="en-US" sz="1600" dirty="0">
+                <a:solidFill>
+                  <a:schemeClr val="bg1">
+                    <a:lumMod val="95000"/>
+                  </a:schemeClr>
+                </a:solidFill>
+              </a:rPr>
+              <a:t>				r</a:t>
+            </a:r>
+            <a:r>
+              <a:rPr lang="ro-RO" sz="1600" dirty="0">
+                <a:solidFill>
+                  <a:schemeClr val="bg1">
+                    <a:lumMod val="95000"/>
+                  </a:schemeClr>
+                </a:solidFill>
+              </a:rPr>
+              <a:t>equests</a:t>
+            </a:r>
+            <a:endParaRPr lang="en-US" sz="1600" dirty="0">
+              <a:solidFill>
+                <a:schemeClr val="bg1">
+                  <a:lumMod val="95000"/>
+                </a:schemeClr>
+              </a:solidFill>
+            </a:endParaRPr>
+          </a:p>
+          <a:p>
+            <a:pPr lvl="4"/>
+            <a:r>
+              <a:rPr lang="en-US" sz="1600" dirty="0">
+                <a:solidFill>
+                  <a:schemeClr val="bg1">
+                    <a:lumMod val="95000"/>
+                  </a:schemeClr>
+                </a:solidFill>
+              </a:rPr>
+              <a:t>			l</a:t>
+            </a:r>
+            <a:r>
+              <a:rPr lang="ro-RO" sz="1600" dirty="0">
+                <a:solidFill>
+                  <a:schemeClr val="bg1">
+                    <a:lumMod val="95000"/>
+                  </a:schemeClr>
+                </a:solidFill>
+              </a:rPr>
+              <a:t>xml</a:t>
+            </a:r>
+            <a:endParaRPr lang="en-US" sz="1600" dirty="0">
+              <a:solidFill>
+                <a:schemeClr val="bg1">
+                  <a:lumMod val="95000"/>
+                </a:schemeClr>
+              </a:solidFill>
+            </a:endParaRPr>
+          </a:p>
+          <a:p>
+            <a:pPr lvl="4"/>
+            <a:r>
+              <a:rPr lang="en-US" sz="1600" dirty="0">
+                <a:solidFill>
+                  <a:schemeClr val="bg1">
+                    <a:lumMod val="95000"/>
+                  </a:schemeClr>
+                </a:solidFill>
+              </a:rPr>
+              <a:t>	s</a:t>
+            </a:r>
+            <a:r>
+              <a:rPr lang="ro-RO" sz="1600" dirty="0">
+                <a:solidFill>
+                  <a:schemeClr val="bg1">
+                    <a:lumMod val="95000"/>
+                  </a:schemeClr>
+                </a:solidFill>
+              </a:rPr>
+              <a:t>tatsmodels</a:t>
+            </a:r>
+            <a:endParaRPr lang="en-US" sz="1600" dirty="0">
+              <a:solidFill>
+                <a:schemeClr val="bg1">
+                  <a:lumMod val="95000"/>
+                </a:schemeClr>
+              </a:solidFill>
+            </a:endParaRPr>
+          </a:p>
+          <a:p>
+            <a:pPr lvl="4"/>
+            <a:r>
+              <a:rPr lang="en-US" sz="1600" dirty="0">
+                <a:solidFill>
+                  <a:schemeClr val="bg1">
+                    <a:lumMod val="95000"/>
+                  </a:schemeClr>
+                </a:solidFill>
+              </a:rPr>
+              <a:t>s</a:t>
+            </a:r>
+            <a:r>
+              <a:rPr lang="ro-RO" sz="1600" dirty="0">
+                <a:solidFill>
+                  <a:schemeClr val="bg1">
+                    <a:lumMod val="95000"/>
+                  </a:schemeClr>
+                </a:solidFill>
+              </a:rPr>
+              <a:t>cipy</a:t>
+            </a:r>
+            <a:endParaRPr lang="en-US" sz="1600" dirty="0">
+              <a:solidFill>
+                <a:schemeClr val="bg1">
+                  <a:lumMod val="95000"/>
+                </a:schemeClr>
+              </a:solidFill>
+            </a:endParaRPr>
+          </a:p>
+          <a:p>
+            <a:pPr lvl="2"/>
+            <a:r>
+              <a:rPr lang="en-US" sz="1600" dirty="0" err="1">
+                <a:solidFill>
+                  <a:schemeClr val="bg1">
+                    <a:lumMod val="95000"/>
+                  </a:schemeClr>
+                </a:solidFill>
+              </a:rPr>
+              <a:t>catboost</a:t>
+            </a:r>
+            <a:endParaRPr lang="en-US" sz="1600" dirty="0">
+              <a:solidFill>
+                <a:schemeClr val="bg1">
+                  <a:lumMod val="95000"/>
+                </a:schemeClr>
+              </a:solidFill>
+            </a:endParaRPr>
+          </a:p>
+          <a:p>
+            <a:r>
+              <a:rPr lang="en-US" sz="1600" dirty="0">
+                <a:solidFill>
+                  <a:schemeClr val="bg1">
+                    <a:lumMod val="95000"/>
+                  </a:schemeClr>
+                </a:solidFill>
+              </a:rPr>
+              <a:t>        </a:t>
+            </a:r>
+            <a:r>
+              <a:rPr lang="en-US" sz="1600" dirty="0" err="1">
+                <a:solidFill>
+                  <a:schemeClr val="bg1">
+                    <a:lumMod val="95000"/>
+                  </a:schemeClr>
+                </a:solidFill>
+              </a:rPr>
+              <a:t>ngboost</a:t>
+            </a:r>
+            <a:endParaRPr lang="en-US" sz="1600" dirty="0">
+              <a:solidFill>
+                <a:schemeClr val="bg1">
+                  <a:lumMod val="95000"/>
+                </a:schemeClr>
+              </a:solidFill>
+            </a:endParaRPr>
+          </a:p>
+          <a:p>
+            <a:pPr lvl="4"/>
+            <a:endParaRPr lang="en-US" sz="1600" dirty="0">
+              <a:solidFill>
+                <a:schemeClr val="bg1">
+                  <a:lumMod val="95000"/>
+                </a:schemeClr>
+              </a:solidFill>
+            </a:endParaRPr>
+          </a:p>
+          <a:p>
+            <a:pPr lvl="4"/>
+            <a:endParaRPr lang="en-US" sz="1600" dirty="0">
+              <a:solidFill>
+                <a:schemeClr val="bg1">
+                  <a:lumMod val="95000"/>
+                </a:schemeClr>
+              </a:solidFill>
+            </a:endParaRPr>
+          </a:p>
+        </p:txBody>
+      </p:sp>
+    </p:spTree>
+    <p:extLst>
+      <p:ext uri="{BB962C8B-B14F-4D97-AF65-F5344CB8AC3E}">
+        <p14:creationId xmlns:p14="http://schemas.microsoft.com/office/powerpoint/2010/main" val="3604639979"/>
+      </p:ext>
+    </p:extLst>
+  </p:cSld>
+  <p:clrMapOvr>
+    <a:masterClrMapping/>
+  </p:clrMapOvr>
+</p:sld>
+</file>
+
+<file path=ppt/slides/slide6.xml><?xml version="1.0" encoding="utf-8"?>
 <p:sld xmlns:a="http://schemas.openxmlformats.org/drawingml/2006/main" xmlns:r="http://schemas.openxmlformats.org/officeDocument/2006/relationships" xmlns:p="http://schemas.openxmlformats.org/presentationml/2006/main">
   <p:cSld>
     <p:spTree>
@@ -5200,6 +8654,10 @@
           <a:lstStyle/>
           <a:p>
             <a:r>
+              <a:rPr lang="en-US" b="1" i="1" dirty="0"/>
+              <a:t>4. </a:t>
+            </a:r>
+            <a:r>
               <a:rPr lang="en-US" b="1" i="1" dirty="0" err="1"/>
               <a:t>Perioada</a:t>
             </a:r>
@@ -5227,7 +8685,7 @@
 </p:sld>
 </file>
 
-<file path=ppt/slides/slide4.xml><?xml version="1.0" encoding="utf-8"?>
+<file path=ppt/slides/slide7.xml><?xml version="1.0" encoding="utf-8"?>
 <p:sld xmlns:a="http://schemas.openxmlformats.org/drawingml/2006/main" xmlns:r="http://schemas.openxmlformats.org/officeDocument/2006/relationships" xmlns:p="http://schemas.openxmlformats.org/presentationml/2006/main">
   <p:cSld>
     <p:spTree>
@@ -6016,7 +9474,7 @@
 </p:sld>
 </file>
 
-<file path=ppt/slides/slide5.xml><?xml version="1.0" encoding="utf-8"?>
+<file path=ppt/slides/slide8.xml><?xml version="1.0" encoding="utf-8"?>
 <p:sld xmlns:a="http://schemas.openxmlformats.org/drawingml/2006/main" xmlns:r="http://schemas.openxmlformats.org/officeDocument/2006/relationships" xmlns:p="http://schemas.openxmlformats.org/presentationml/2006/main">
   <p:cSld>
     <p:spTree>
@@ -6061,6 +9519,10 @@
           </a:bodyPr>
           <a:lstStyle/>
           <a:p>
+            <a:r>
+              <a:rPr lang="en-US" sz="2000" b="1" i="1" dirty="0"/>
+              <a:t>5. </a:t>
+            </a:r>
             <a:r>
               <a:rPr lang="en-US" sz="2000" b="1" i="1" dirty="0" err="1"/>
               <a:t>Perioada</a:t>
@@ -7664,7 +11126,7 @@
 </p:sld>
 </file>
 
-<file path=ppt/slides/slide6.xml><?xml version="1.0" encoding="utf-8"?>
+<file path=ppt/slides/slide9.xml><?xml version="1.0" encoding="utf-8"?>
 <p:sld xmlns:a="http://schemas.openxmlformats.org/drawingml/2006/main" xmlns:r="http://schemas.openxmlformats.org/officeDocument/2006/relationships" xmlns:p="http://schemas.openxmlformats.org/presentationml/2006/main">
   <p:cSld>
     <p:spTree>
@@ -8003,673 +11465,6 @@
     <p:extLst>
       <p:ext uri="{BB962C8B-B14F-4D97-AF65-F5344CB8AC3E}">
         <p14:creationId xmlns:p14="http://schemas.microsoft.com/office/powerpoint/2010/main" val="750761132"/>
-      </p:ext>
-    </p:extLst>
-  </p:cSld>
-  <p:clrMapOvr>
-    <a:masterClrMapping/>
-  </p:clrMapOvr>
-</p:sld>
-</file>
-
-<file path=ppt/slides/slide7.xml><?xml version="1.0" encoding="utf-8"?>
-<p:sld xmlns:a="http://schemas.openxmlformats.org/drawingml/2006/main" xmlns:r="http://schemas.openxmlformats.org/officeDocument/2006/relationships" xmlns:p="http://schemas.openxmlformats.org/presentationml/2006/main">
-  <p:cSld>
-    <p:spTree>
-      <p:nvGrpSpPr>
-        <p:cNvPr id="1" name=""/>
-        <p:cNvGrpSpPr/>
-        <p:nvPr/>
-      </p:nvGrpSpPr>
-      <p:grpSpPr>
-        <a:xfrm>
-          <a:off x="0" y="0"/>
-          <a:ext cx="0" cy="0"/>
-          <a:chOff x="0" y="0"/>
-          <a:chExt cx="0" cy="0"/>
-        </a:xfrm>
-      </p:grpSpPr>
-      <p:sp>
-        <p:nvSpPr>
-          <p:cNvPr id="2" name="TextBox 1">
-            <a:extLst>
-              <a:ext uri="{FF2B5EF4-FFF2-40B4-BE49-F238E27FC236}">
-                <a16:creationId xmlns:a16="http://schemas.microsoft.com/office/drawing/2014/main" id="{EE3FDAD6-0123-1917-8A66-2A5C3BFB4287}"/>
-              </a:ext>
-            </a:extLst>
-          </p:cNvPr>
-          <p:cNvSpPr txBox="1"/>
-          <p:nvPr/>
-        </p:nvSpPr>
-        <p:spPr>
-          <a:xfrm>
-            <a:off x="283464" y="98798"/>
-            <a:ext cx="2871216" cy="369332"/>
-          </a:xfrm>
-          <a:prstGeom prst="rect">
-            <a:avLst/>
-          </a:prstGeom>
-          <a:noFill/>
-        </p:spPr>
-        <p:txBody>
-          <a:bodyPr wrap="square" rtlCol="0">
-            <a:spAutoFit/>
-          </a:bodyPr>
-          <a:lstStyle/>
-          <a:p>
-            <a:r>
-              <a:rPr lang="en-US" b="1" dirty="0" err="1"/>
-              <a:t>merged_data</a:t>
-            </a:r>
-            <a:r>
-              <a:rPr lang="en-US" b="1" dirty="0"/>
-              <a:t> </a:t>
-            </a:r>
-            <a:r>
-              <a:rPr lang="en-US" dirty="0"/>
-              <a:t>directory </a:t>
-            </a:r>
-            <a:endParaRPr lang="ro-RO" dirty="0"/>
-          </a:p>
-        </p:txBody>
-      </p:sp>
-      <p:pic>
-        <p:nvPicPr>
-          <p:cNvPr id="4" name="Picture 3" descr="A screenshot of a computer&#10;&#10;AI-generated content may be incorrect.">
-            <a:extLst>
-              <a:ext uri="{FF2B5EF4-FFF2-40B4-BE49-F238E27FC236}">
-                <a16:creationId xmlns:a16="http://schemas.microsoft.com/office/drawing/2014/main" id="{5A742718-C2FC-A45D-A41E-DCF6E3D72CD2}"/>
-              </a:ext>
-            </a:extLst>
-          </p:cNvPr>
-          <p:cNvPicPr>
-            <a:picLocks noChangeAspect="1"/>
-          </p:cNvPicPr>
-          <p:nvPr/>
-        </p:nvPicPr>
-        <p:blipFill>
-          <a:blip r:embed="rId2"/>
-          <a:stretch>
-            <a:fillRect/>
-          </a:stretch>
-        </p:blipFill>
-        <p:spPr>
-          <a:xfrm>
-            <a:off x="0" y="468130"/>
-            <a:ext cx="4966760" cy="2960870"/>
-          </a:xfrm>
-          <a:prstGeom prst="rect">
-            <a:avLst/>
-          </a:prstGeom>
-        </p:spPr>
-      </p:pic>
-      <p:sp>
-        <p:nvSpPr>
-          <p:cNvPr id="5" name="TextBox 4">
-            <a:extLst>
-              <a:ext uri="{FF2B5EF4-FFF2-40B4-BE49-F238E27FC236}">
-                <a16:creationId xmlns:a16="http://schemas.microsoft.com/office/drawing/2014/main" id="{E147D2DA-B3AB-951D-A2FF-E63BF9834729}"/>
-              </a:ext>
-            </a:extLst>
-          </p:cNvPr>
-          <p:cNvSpPr txBox="1"/>
-          <p:nvPr/>
-        </p:nvSpPr>
-        <p:spPr>
-          <a:xfrm>
-            <a:off x="3057144" y="98798"/>
-            <a:ext cx="8851392" cy="369332"/>
-          </a:xfrm>
-          <a:prstGeom prst="rect">
-            <a:avLst/>
-          </a:prstGeom>
-          <a:noFill/>
-        </p:spPr>
-        <p:txBody>
-          <a:bodyPr wrap="square" rtlCol="0">
-            <a:spAutoFit/>
-          </a:bodyPr>
-          <a:lstStyle/>
-          <a:p>
-            <a:r>
-              <a:rPr lang="en-US" dirty="0" err="1"/>
-              <a:t>Practic</a:t>
-            </a:r>
-            <a:r>
-              <a:rPr lang="en-US" dirty="0"/>
-              <a:t>, </a:t>
-            </a:r>
-            <a:r>
-              <a:rPr lang="en-US" dirty="0" err="1"/>
-              <a:t>aici</a:t>
-            </a:r>
-            <a:r>
-              <a:rPr lang="en-US" dirty="0"/>
-              <a:t> “</a:t>
-            </a:r>
-            <a:r>
-              <a:rPr lang="en-US" dirty="0" err="1"/>
-              <a:t>lipim</a:t>
-            </a:r>
-            <a:r>
-              <a:rPr lang="en-US" dirty="0"/>
-              <a:t>” </a:t>
-            </a:r>
-            <a:r>
-              <a:rPr lang="en-US" dirty="0" err="1"/>
-              <a:t>rezultatele</a:t>
-            </a:r>
-            <a:r>
-              <a:rPr lang="en-US" dirty="0"/>
-              <a:t> generate din </a:t>
-            </a:r>
-            <a:r>
-              <a:rPr lang="en-US" b="1" dirty="0"/>
-              <a:t>1900 - 2011</a:t>
-            </a:r>
-            <a:r>
-              <a:rPr lang="en-US" dirty="0"/>
-              <a:t>, cu </a:t>
-            </a:r>
-            <a:r>
-              <a:rPr lang="en-US" dirty="0" err="1"/>
-              <a:t>datele</a:t>
-            </a:r>
-            <a:r>
-              <a:rPr lang="en-US" dirty="0"/>
-              <a:t> </a:t>
-            </a:r>
-            <a:r>
-              <a:rPr lang="en-US" dirty="0" err="1"/>
-              <a:t>reale</a:t>
-            </a:r>
-            <a:r>
-              <a:rPr lang="en-US" dirty="0"/>
-              <a:t> din </a:t>
-            </a:r>
-            <a:r>
-              <a:rPr lang="en-US" b="1" dirty="0"/>
-              <a:t>2012 – 2025.</a:t>
-            </a:r>
-            <a:endParaRPr lang="ro-RO" b="1" dirty="0"/>
-          </a:p>
-        </p:txBody>
-      </p:sp>
-      <p:pic>
-        <p:nvPicPr>
-          <p:cNvPr id="7" name="Picture 6" descr="A screenshot of a computer screen&#10;&#10;AI-generated content may be incorrect.">
-            <a:extLst>
-              <a:ext uri="{FF2B5EF4-FFF2-40B4-BE49-F238E27FC236}">
-                <a16:creationId xmlns:a16="http://schemas.microsoft.com/office/drawing/2014/main" id="{DD3E2BCA-9ECC-D4EE-2D4D-4DE3736C9416}"/>
-              </a:ext>
-            </a:extLst>
-          </p:cNvPr>
-          <p:cNvPicPr>
-            <a:picLocks noChangeAspect="1"/>
-          </p:cNvPicPr>
-          <p:nvPr/>
-        </p:nvPicPr>
-        <p:blipFill>
-          <a:blip r:embed="rId3"/>
-          <a:stretch>
-            <a:fillRect/>
-          </a:stretch>
-        </p:blipFill>
-        <p:spPr>
-          <a:xfrm>
-            <a:off x="4966760" y="468130"/>
-            <a:ext cx="3612620" cy="6389870"/>
-          </a:xfrm>
-          <a:prstGeom prst="rect">
-            <a:avLst/>
-          </a:prstGeom>
-        </p:spPr>
-      </p:pic>
-      <p:pic>
-        <p:nvPicPr>
-          <p:cNvPr id="9" name="Picture 8" descr="A screenshot of a computer screen&#10;&#10;AI-generated content may be incorrect.">
-            <a:extLst>
-              <a:ext uri="{FF2B5EF4-FFF2-40B4-BE49-F238E27FC236}">
-                <a16:creationId xmlns:a16="http://schemas.microsoft.com/office/drawing/2014/main" id="{1DAAEAA1-5C46-53DB-CD9A-9AEBE80425FE}"/>
-              </a:ext>
-            </a:extLst>
-          </p:cNvPr>
-          <p:cNvPicPr>
-            <a:picLocks noChangeAspect="1"/>
-          </p:cNvPicPr>
-          <p:nvPr/>
-        </p:nvPicPr>
-        <p:blipFill>
-          <a:blip r:embed="rId4"/>
-          <a:stretch>
-            <a:fillRect/>
-          </a:stretch>
-        </p:blipFill>
-        <p:spPr>
-          <a:xfrm>
-            <a:off x="8579380" y="468130"/>
-            <a:ext cx="3612620" cy="6389870"/>
-          </a:xfrm>
-          <a:prstGeom prst="rect">
-            <a:avLst/>
-          </a:prstGeom>
-        </p:spPr>
-      </p:pic>
-      <p:pic>
-        <p:nvPicPr>
-          <p:cNvPr id="11" name="Picture 10" descr="A graph with a line&#10;&#10;AI-generated content may be incorrect.">
-            <a:extLst>
-              <a:ext uri="{FF2B5EF4-FFF2-40B4-BE49-F238E27FC236}">
-                <a16:creationId xmlns:a16="http://schemas.microsoft.com/office/drawing/2014/main" id="{DBB54130-2130-256F-E9FB-E50E9B4F2A35}"/>
-              </a:ext>
-            </a:extLst>
-          </p:cNvPr>
-          <p:cNvPicPr>
-            <a:picLocks noChangeAspect="1"/>
-          </p:cNvPicPr>
-          <p:nvPr/>
-        </p:nvPicPr>
-        <p:blipFill>
-          <a:blip r:embed="rId5"/>
-          <a:stretch>
-            <a:fillRect/>
-          </a:stretch>
-        </p:blipFill>
-        <p:spPr>
-          <a:xfrm>
-            <a:off x="0" y="3511296"/>
-            <a:ext cx="4966760" cy="3346704"/>
-          </a:xfrm>
-          <a:prstGeom prst="rect">
-            <a:avLst/>
-          </a:prstGeom>
-        </p:spPr>
-      </p:pic>
-    </p:spTree>
-    <p:extLst>
-      <p:ext uri="{BB962C8B-B14F-4D97-AF65-F5344CB8AC3E}">
-        <p14:creationId xmlns:p14="http://schemas.microsoft.com/office/powerpoint/2010/main" val="2371256947"/>
-      </p:ext>
-    </p:extLst>
-  </p:cSld>
-  <p:clrMapOvr>
-    <a:masterClrMapping/>
-  </p:clrMapOvr>
-</p:sld>
-</file>
-
-<file path=ppt/slides/slide8.xml><?xml version="1.0" encoding="utf-8"?>
-<p:sld xmlns:a="http://schemas.openxmlformats.org/drawingml/2006/main" xmlns:r="http://schemas.openxmlformats.org/officeDocument/2006/relationships" xmlns:p="http://schemas.openxmlformats.org/presentationml/2006/main">
-  <p:cSld>
-    <p:spTree>
-      <p:nvGrpSpPr>
-        <p:cNvPr id="1" name=""/>
-        <p:cNvGrpSpPr/>
-        <p:nvPr/>
-      </p:nvGrpSpPr>
-      <p:grpSpPr>
-        <a:xfrm>
-          <a:off x="0" y="0"/>
-          <a:ext cx="0" cy="0"/>
-          <a:chOff x="0" y="0"/>
-          <a:chExt cx="0" cy="0"/>
-        </a:xfrm>
-      </p:grpSpPr>
-      <p:pic>
-        <p:nvPicPr>
-          <p:cNvPr id="3" name="Picture 2" descr="A screenshot of a computer program&#10;&#10;AI-generated content may be incorrect.">
-            <a:extLst>
-              <a:ext uri="{FF2B5EF4-FFF2-40B4-BE49-F238E27FC236}">
-                <a16:creationId xmlns:a16="http://schemas.microsoft.com/office/drawing/2014/main" id="{1CB767FD-0FEA-C783-6303-91139F844534}"/>
-              </a:ext>
-            </a:extLst>
-          </p:cNvPr>
-          <p:cNvPicPr>
-            <a:picLocks noChangeAspect="1"/>
-          </p:cNvPicPr>
-          <p:nvPr/>
-        </p:nvPicPr>
-        <p:blipFill>
-          <a:blip r:embed="rId2"/>
-          <a:stretch>
-            <a:fillRect/>
-          </a:stretch>
-        </p:blipFill>
-        <p:spPr>
-          <a:xfrm>
-            <a:off x="0" y="0"/>
-            <a:ext cx="3668233" cy="6858000"/>
-          </a:xfrm>
-          <a:prstGeom prst="rect">
-            <a:avLst/>
-          </a:prstGeom>
-        </p:spPr>
-      </p:pic>
-      <p:sp>
-        <p:nvSpPr>
-          <p:cNvPr id="4" name="TextBox 3">
-            <a:extLst>
-              <a:ext uri="{FF2B5EF4-FFF2-40B4-BE49-F238E27FC236}">
-                <a16:creationId xmlns:a16="http://schemas.microsoft.com/office/drawing/2014/main" id="{7D8936D7-B3BB-C8DA-6549-F10E622CB34D}"/>
-              </a:ext>
-            </a:extLst>
-          </p:cNvPr>
-          <p:cNvSpPr txBox="1"/>
-          <p:nvPr/>
-        </p:nvSpPr>
-        <p:spPr>
-          <a:xfrm>
-            <a:off x="3668233" y="470773"/>
-            <a:ext cx="8375904" cy="6647974"/>
-          </a:xfrm>
-          <a:prstGeom prst="rect">
-            <a:avLst/>
-          </a:prstGeom>
-          <a:noFill/>
-        </p:spPr>
-        <p:txBody>
-          <a:bodyPr wrap="square" rtlCol="0">
-            <a:spAutoFit/>
-          </a:bodyPr>
-          <a:lstStyle/>
-          <a:p>
-            <a:r>
-              <a:rPr lang="en-US" sz="1400" b="1" dirty="0"/>
-              <a:t>n</a:t>
-            </a:r>
-            <a:r>
-              <a:rPr lang="ro-RO" sz="1400" b="1" dirty="0"/>
-              <a:t>ew_features</a:t>
-            </a:r>
-            <a:r>
-              <a:rPr lang="en-US" sz="1400" b="1" dirty="0"/>
-              <a:t>:</a:t>
-            </a:r>
-            <a:endParaRPr lang="ro-RO" sz="1400" b="1" dirty="0"/>
-          </a:p>
-          <a:p>
-            <a:r>
-              <a:rPr lang="ro-RO" sz="1400" dirty="0"/>
-              <a:t>Acest director contine seturile de date auxiliare si scripturile folosite pentru reconstructia, curatarea si unificarea indicatorilor macroeconomici utilizati ca variabile explicative in modelele de predictie a preturilor imobiliare.</a:t>
-            </a:r>
-            <a:endParaRPr lang="en-US" sz="1400" dirty="0"/>
-          </a:p>
-          <a:p>
-            <a:endParaRPr lang="en-US" sz="1400" dirty="0"/>
-          </a:p>
-          <a:p>
-            <a:r>
-              <a:rPr lang="ro-RO" sz="1400" b="1" dirty="0"/>
-              <a:t>merged_data</a:t>
-            </a:r>
-            <a:r>
-              <a:rPr lang="en-US" sz="1400" b="1" dirty="0"/>
-              <a:t>:</a:t>
-            </a:r>
-            <a:endParaRPr lang="ro-RO" sz="1400" b="1" dirty="0"/>
-          </a:p>
-          <a:p>
-            <a:r>
-              <a:rPr lang="ro-RO" sz="1400" dirty="0"/>
-              <a:t>Contine fisierele rezultate in urma imbinarilor finale ale tuturor indicatorilor economici utilizati in proiect. Aici sunt centralizate datele privind inflatia, costurile de constructie, dinamica urbana si PIB-ul, aliniate temporal si pregatite pentru antrenarea modelelor de predictie.</a:t>
-            </a:r>
-          </a:p>
-          <a:p>
-            <a:endParaRPr lang="ro-RO" sz="1400" dirty="0"/>
-          </a:p>
-          <a:p>
-            <a:r>
-              <a:rPr lang="it-IT" sz="1400" b="1" dirty="0"/>
-              <a:t>web_data/INFL:</a:t>
-            </a:r>
-          </a:p>
-          <a:p>
-            <a:r>
-              <a:rPr lang="ro-RO" sz="1400" dirty="0"/>
-              <a:t>Include date istorice si reconstruite privind inflatia, pentru perioada 1900–2025. Sunt utilizate atat date reale (post-1970), cat si serii estimate pentru intervalele fara informatii oficiale, impreuna cu scripturi de predictie si validare a evolutiei inflatiei.</a:t>
-            </a:r>
-            <a:endParaRPr lang="en-US" sz="1400" dirty="0"/>
-          </a:p>
-          <a:p>
-            <a:br>
-              <a:rPr lang="it-IT" sz="1400" dirty="0"/>
-            </a:br>
-            <a:r>
-              <a:rPr lang="ro-RO" sz="1400" b="1" dirty="0"/>
-              <a:t>web_data/mat_construct_increase</a:t>
-            </a:r>
-            <a:r>
-              <a:rPr lang="en-US" sz="1400" b="1" dirty="0"/>
-              <a:t>:</a:t>
-            </a:r>
-            <a:endParaRPr lang="ro-RO" sz="1400" b="1" dirty="0"/>
-          </a:p>
-          <a:p>
-            <a:r>
-              <a:rPr lang="ro-RO" sz="1400" dirty="0"/>
-              <a:t>Contine date si scripturi pentru reconstructia indicelui costurilor de constructie pe termen lung, inclusiv curatarea seriilor INS si generarea unei evolutii continue pentru perioada 1900–2025.</a:t>
-            </a:r>
-          </a:p>
-          <a:p>
-            <a:br>
-              <a:rPr lang="ro-RO" sz="1400" dirty="0"/>
-            </a:br>
-            <a:r>
-              <a:rPr lang="ro-RO" sz="1400" b="1" dirty="0"/>
-              <a:t>web_data/PIB</a:t>
-            </a:r>
-            <a:r>
-              <a:rPr lang="en-US" sz="1400" b="1" dirty="0"/>
-              <a:t>:</a:t>
-            </a:r>
-            <a:endParaRPr lang="ro-RO" sz="1400" b="1" dirty="0"/>
-          </a:p>
-          <a:p>
-            <a:r>
-              <a:rPr lang="ro-RO" sz="1400" dirty="0"/>
-              <a:t>Include date despre produsul intern brut la nivel regional (judetul Dolj si Oltenia). Sunt combinate surse reale (Eurostat, INS) cu serii generate pentru perioadele lipsa, rezultand o serie continua PIB 1900–2025 utilizata ca indicator al dezvoltarii economice locale.</a:t>
-            </a:r>
-            <a:endParaRPr lang="en-US" sz="1400" dirty="0"/>
-          </a:p>
-          <a:p>
-            <a:endParaRPr lang="en-US" sz="1400" dirty="0"/>
-          </a:p>
-          <a:p>
-            <a:r>
-              <a:rPr lang="ro-RO" sz="1400" b="1" dirty="0"/>
-              <a:t>web_data/URBAN_INCREASE</a:t>
-            </a:r>
-            <a:r>
-              <a:rPr lang="en-US" sz="1400" b="1" dirty="0"/>
-              <a:t>:</a:t>
-            </a:r>
-            <a:endParaRPr lang="ro-RO" sz="1400" b="1" dirty="0"/>
-          </a:p>
-          <a:p>
-            <a:r>
-              <a:rPr lang="ro-RO" sz="1400" dirty="0"/>
-              <a:t>Contine date privind evolutia populatiei urbane si a gradului de urbanizare in judetul Dolj. Seria este construita prin combinarea datelor INS cu estimari pentru perioadele istorice, reflectand presiunea urbana asupra pietei imobiliare.</a:t>
-            </a:r>
-            <a:br>
-              <a:rPr lang="ro-RO" dirty="0"/>
-            </a:br>
-            <a:endParaRPr lang="ro-RO" dirty="0"/>
-          </a:p>
-          <a:p>
-            <a:endParaRPr lang="ro-RO" dirty="0"/>
-          </a:p>
-        </p:txBody>
-      </p:sp>
-    </p:spTree>
-    <p:extLst>
-      <p:ext uri="{BB962C8B-B14F-4D97-AF65-F5344CB8AC3E}">
-        <p14:creationId xmlns:p14="http://schemas.microsoft.com/office/powerpoint/2010/main" val="461350761"/>
-      </p:ext>
-    </p:extLst>
-  </p:cSld>
-  <p:clrMapOvr>
-    <a:masterClrMapping/>
-  </p:clrMapOvr>
-</p:sld>
-</file>
-
-<file path=ppt/slides/slide9.xml><?xml version="1.0" encoding="utf-8"?>
-<p:sld xmlns:a="http://schemas.openxmlformats.org/drawingml/2006/main" xmlns:r="http://schemas.openxmlformats.org/officeDocument/2006/relationships" xmlns:p="http://schemas.openxmlformats.org/presentationml/2006/main">
-  <p:cSld>
-    <p:spTree>
-      <p:nvGrpSpPr>
-        <p:cNvPr id="1" name=""/>
-        <p:cNvGrpSpPr/>
-        <p:nvPr/>
-      </p:nvGrpSpPr>
-      <p:grpSpPr>
-        <a:xfrm>
-          <a:off x="0" y="0"/>
-          <a:ext cx="0" cy="0"/>
-          <a:chOff x="0" y="0"/>
-          <a:chExt cx="0" cy="0"/>
-        </a:xfrm>
-      </p:grpSpPr>
-      <p:pic>
-        <p:nvPicPr>
-          <p:cNvPr id="3" name="Picture 2" descr="A graph showing a line&#10;&#10;AI-generated content may be incorrect.">
-            <a:extLst>
-              <a:ext uri="{FF2B5EF4-FFF2-40B4-BE49-F238E27FC236}">
-                <a16:creationId xmlns:a16="http://schemas.microsoft.com/office/drawing/2014/main" id="{8D7F7DF3-3115-53D7-EBE6-EFE3283EB3CA}"/>
-              </a:ext>
-            </a:extLst>
-          </p:cNvPr>
-          <p:cNvPicPr>
-            <a:picLocks noChangeAspect="1"/>
-          </p:cNvPicPr>
-          <p:nvPr/>
-        </p:nvPicPr>
-        <p:blipFill>
-          <a:blip r:embed="rId2"/>
-          <a:stretch>
-            <a:fillRect/>
-          </a:stretch>
-        </p:blipFill>
-        <p:spPr>
-          <a:xfrm>
-            <a:off x="722376" y="1"/>
-            <a:ext cx="10460736" cy="4398264"/>
-          </a:xfrm>
-          <a:prstGeom prst="rect">
-            <a:avLst/>
-          </a:prstGeom>
-        </p:spPr>
-      </p:pic>
-      <p:sp>
-        <p:nvSpPr>
-          <p:cNvPr id="4" name="TextBox 3">
-            <a:extLst>
-              <a:ext uri="{FF2B5EF4-FFF2-40B4-BE49-F238E27FC236}">
-                <a16:creationId xmlns:a16="http://schemas.microsoft.com/office/drawing/2014/main" id="{94CD2870-01AE-33B5-30E2-3BC5279778D2}"/>
-              </a:ext>
-            </a:extLst>
-          </p:cNvPr>
-          <p:cNvSpPr txBox="1"/>
-          <p:nvPr/>
-        </p:nvSpPr>
-        <p:spPr>
-          <a:xfrm>
-            <a:off x="0" y="4334231"/>
-            <a:ext cx="12188952" cy="2523768"/>
-          </a:xfrm>
-          <a:prstGeom prst="rect">
-            <a:avLst/>
-          </a:prstGeom>
-          <a:noFill/>
-        </p:spPr>
-        <p:txBody>
-          <a:bodyPr wrap="square" rtlCol="0">
-            <a:spAutoFit/>
-          </a:bodyPr>
-          <a:lstStyle/>
-          <a:p>
-            <a:r>
-              <a:rPr lang="ro-RO" sz="1400" dirty="0"/>
-              <a:t>Pentru prognoza pretului pe metru patrat a fost adoptata o </a:t>
-            </a:r>
-            <a:r>
-              <a:rPr lang="ro-RO" sz="1400" b="1" dirty="0"/>
-              <a:t>abordare hibrida </a:t>
-            </a:r>
-            <a:r>
-              <a:rPr lang="ro-RO" sz="1400" dirty="0"/>
-              <a:t>care </a:t>
-            </a:r>
-            <a:r>
-              <a:rPr lang="ro-RO" sz="1400" b="1" dirty="0"/>
-              <a:t>combina un model de tip State Space cu un algoritm de invatare automata CatBoost</a:t>
-            </a:r>
-            <a:r>
-              <a:rPr lang="ro-RO" sz="1400" dirty="0"/>
-              <a:t>. Modelul State Space este utilizat pentru captarea trendului pe termen lung si a continuitatii structurale a seriei temporale, fiind capabil sa modeleze evolutii graduale si schimbari de nivel specifice proceselor economice. Acest model asigura o extrapolare stabila si economic plauzibila in afara intervalului de date observate.</a:t>
-            </a:r>
-            <a:endParaRPr lang="en-US" sz="1400" dirty="0"/>
-          </a:p>
-          <a:p>
-            <a:endParaRPr lang="ro-RO" sz="1400" dirty="0"/>
-          </a:p>
-          <a:p>
-            <a:r>
-              <a:rPr lang="ro-RO" sz="1400" dirty="0"/>
-              <a:t>CatBoost este utilizat complementar, fiind antrenat pe reziduurile modelului State Space. Rolul sau este de a surprinde relatiile neliniare si corectiile locale care nu pot fi modelate eficient printr-un model pur structural. Prin aceasta separare a rolurilor, CatBoost ajusteaza fin predictiile fara a distorsiona trendul global.</a:t>
-            </a:r>
-          </a:p>
-          <a:p>
-            <a:endParaRPr lang="en-US" dirty="0"/>
-          </a:p>
-          <a:p>
-            <a:r>
-              <a:rPr lang="ro-RO" sz="1400" dirty="0"/>
-              <a:t>Utilizarea exclusiva a modelului State Space permite obtinerea unor prognoze stabile si coerente din punct de vedere economic, insa acestea pot subestima dinamica accelerata a pietei in anumite perioade. Pe de alta parte, modelele de invatare automata aplicate individual tind sa ofere rezultate bune pe intervale scurte, dar pot genera extrapolari instabile sau regresii catre valori medii atunci cand sunt utilizate pentru prognoze pe termen lung. Abordarea hibrida propusa valorifica avantajele ambelor tipuri de modele, oferind prognoze robuste, consistente si adaptate evolutiei reale a pietei imobiliare.</a:t>
-            </a:r>
-          </a:p>
-        </p:txBody>
-      </p:sp>
-      <p:sp>
-        <p:nvSpPr>
-          <p:cNvPr id="5" name="TextBox 4">
-            <a:extLst>
-              <a:ext uri="{FF2B5EF4-FFF2-40B4-BE49-F238E27FC236}">
-                <a16:creationId xmlns:a16="http://schemas.microsoft.com/office/drawing/2014/main" id="{EB2ED6FF-8358-7BAD-C43A-7FAFE962D694}"/>
-              </a:ext>
-            </a:extLst>
-          </p:cNvPr>
-          <p:cNvSpPr txBox="1"/>
-          <p:nvPr/>
-        </p:nvSpPr>
-        <p:spPr>
-          <a:xfrm>
-            <a:off x="5952744" y="3429000"/>
-            <a:ext cx="5175504" cy="369332"/>
-          </a:xfrm>
-          <a:prstGeom prst="rect">
-            <a:avLst/>
-          </a:prstGeom>
-          <a:noFill/>
-        </p:spPr>
-        <p:txBody>
-          <a:bodyPr wrap="square" rtlCol="0">
-            <a:spAutoFit/>
-          </a:bodyPr>
-          <a:lstStyle/>
-          <a:p>
-            <a:r>
-              <a:rPr lang="it-IT" b="1" dirty="0"/>
-              <a:t>Modelarea si prognoza preturilor – abordare hibrida</a:t>
-            </a:r>
-            <a:endParaRPr lang="ro-RO" b="1" dirty="0"/>
-          </a:p>
-        </p:txBody>
-      </p:sp>
-    </p:spTree>
-    <p:extLst>
-      <p:ext uri="{BB962C8B-B14F-4D97-AF65-F5344CB8AC3E}">
-        <p14:creationId xmlns:p14="http://schemas.microsoft.com/office/powerpoint/2010/main" val="4250093860"/>
       </p:ext>
     </p:extLst>
   </p:cSld>
